--- a/docs/The Controls That Matter.pptx
+++ b/docs/The Controls That Matter.pptx
@@ -121,7 +121,7 @@
   <p:extLst>
     <p:ext uri="{521415D9-36F7-43E2-AB2F-B90AF26B5E84}">
       <p14:sectionLst xmlns:p14="http://schemas.microsoft.com/office/powerpoint/2010/main">
-        <p14:section name="Overview" id="{33216aa8-7994-a250-41a1-29e0fcc5b495}">
+        <p14:section name="Overview" id="{f03fb022-9087-d1fb-c5a1-f419678fbd7c}">
           <p14:sldIdLst>
             <p14:sldId id="256"/>
             <p14:sldId id="257"/>
@@ -129,37 +129,37 @@
             <p14:sldId id="259"/>
           </p14:sldIdLst>
         </p14:section>
-        <p14:section name="Identity and access" id="{8b884a4e-24ce-c992-9905-e64fdbf66aa7}">
+        <p14:section name="Identity and access" id="{f97e0c09-3556-b4cf-2767-8ffec2aa440f}">
           <p14:sldIdLst>
             <p14:sldId id="260"/>
             <p14:sldId id="261"/>
           </p14:sldIdLst>
         </p14:section>
-        <p14:section name="Endpoint and workload" id="{072fddaa-4740-700d-9f1f-d0a834955059}">
+        <p14:section name="Endpoint and workload" id="{7e14017d-bc95-b596-7d49-051fa7382eb5}">
           <p14:sldIdLst>
             <p14:sldId id="262"/>
             <p14:sldId id="263"/>
           </p14:sldIdLst>
         </p14:section>
-        <p14:section name="Network and boundary" id="{ab13c4d9-f59a-d0ca-c767-d84b4ea783f6}">
+        <p14:section name="Network and boundary" id="{b5a24a79-284e-aa39-f36e-3566c6199faa}">
           <p14:sldIdLst>
             <p14:sldId id="264"/>
             <p14:sldId id="265"/>
           </p14:sldIdLst>
         </p14:section>
-        <p14:section name="Data protection" id="{68c21bef-fb7d-a8d6-72df-d109e9441d21}">
+        <p14:section name="Data protection" id="{c7b46240-fbf0-d845-4a72-5351092d04b5}">
           <p14:sldIdLst>
             <p14:sldId id="266"/>
             <p14:sldId id="267"/>
           </p14:sldIdLst>
         </p14:section>
-        <p14:section name="Detection and response" id="{182489fe-d093-d711-8c39-073e9232b897}">
+        <p14:section name="Detection and response" id="{b1197866-a201-d873-ab55-7974f41c0d38}">
           <p14:sldIdLst>
             <p14:sldId id="268"/>
             <p14:sldId id="269"/>
           </p14:sldIdLst>
         </p14:section>
-        <p14:section name="Feedback" id="{792438cc-b205-2743-45a6-569558c37360}">
+        <p14:section name="Feedback" id="{c06557e6-8ea5-9f41-48df-4619bee4bc5e}">
           <p14:sldIdLst>
             <p14:sldId id="270"/>
           </p14:sldIdLst>
@@ -266,7 +266,7 @@
                   <c:v>6</c:v>
                 </c:pt>
                 <c:pt idx="1">
-                  <c:v>6</c:v>
+                  <c:v>5</c:v>
                 </c:pt>
                 <c:pt idx="2">
                   <c:v>5</c:v>
@@ -1013,7 +1013,7 @@
           <a:p>
             <a:r>
               <a:rPr lang="en-US" dirty="0"/>
-              <a:t>Network and boundary, defense in depth controls. Each of these waits on something the client approves, schedules or licenses, and is sequenced on the roadmap. Workload subnets protected by segmentation: Workload subnets with a network security group or a route through the firewall. Storage accounts closed to public networks: Storage accounts with public network access disabled. Blob containers closed to anonymous access: Blob containers set to private at the container level, read in every storage account, so they stay closed even if the account-level setting is relaxed. Directory traffic signed and channel-bound: Domain controllers requiring LDAP server signing and channel binding. NTLMv2 enforced with LM and NTLM refused: Onboarded Windows devices sending NTLMv2 responses only.</a:t>
+              <a:t>Network and boundary, defense in depth controls. Each of these waits on something the client approves, schedules or licenses, and is sequenced on the roadmap. Workload subnets protected by segmentation: Workload subnets with a network security group or a route through the firewall. Storage accounts closed to public networks: Storage accounts with public network access disabled. Blob containers closed to anonymous access: Blob containers set to private at the container level, read in every storage account, so they stay closed even if the account-level setting is relaxed. Directory traffic signed and channel-bound: Domain controllers in Azure requiring LDAP server signing and channel binding. NTLMv2 enforced with LM and NTLM refused: Onboarded Windows virtual machines in Azure sending NTLMv2 responses only.</a:t>
             </a:r>
             <a:endParaRPr lang="en-US" dirty="0"/>
           </a:p>
@@ -1277,7 +1277,7 @@
           <a:p>
             <a:r>
               <a:rPr lang="en-US" dirty="0"/>
-              <a:t>Detection and response, foundational controls. These are configured when the environment is built and are expected at E at every review. Endpoint sensors active on Azure virtual machines: Active sensors among onboarded Azure virtual machines seen in the last 30 days. Workstations and network devices such as firewalls are not part of this measure. Cloud workload protection across the resource estate: Eligible resources on a Standard Defender for Cloud plan. Subscription plan configuration, estimated. Domain controller telemetry collected continuously: Domain controller security events arriving in the workspace. Alerts closed with a documented disposition: Alerts closed in the last 30 days that carry a classification and a closing comment. Defender for Identity sensors healthy on domain controllers: Sensors reporting healthy, of sensors registered. Audit logging initiative compliant across its resources: Resources compliant with the ATMO-MXDR diagnostic logging initiative.</a:t>
+              <a:t>Detection and response, foundational controls. These are configured when the environment is built and are expected at E at every review. Endpoint sensors active on onboarded Azure virtual machines: Active sensors among the Azure virtual machines onboarded to Defender for Endpoint, seen in the last 7 days. Workstations and network devices such as firewalls are not part of this measure. Cloud workload protection across the resource estate: Eligible resources on a Standard Defender for Cloud plan. Subscription plan configuration, estimated. Domain controller telemetry collected continuously: Domain controller security events arriving in the workspace. Alerts closed with a documented disposition: Alerts closed in the last 30 days that carry a classification and a closing comment. Defender for Identity sensors healthy on domain controllers: Sensors reporting healthy, of sensors registered. Audit logging initiative compliant across its resources: Resources compliant with the ATMO-MXDR diagnostic logging initiative.</a:t>
             </a:r>
             <a:endParaRPr lang="en-US" dirty="0"/>
           </a:p>
@@ -1981,7 +1981,7 @@
           <a:p>
             <a:r>
               <a:rPr lang="en-US" dirty="0"/>
-              <a:t>Endpoint and workload, foundational controls. These are configured when the environment is built and are expected at E at every review. Endpoint detection and response deployed: Devices seen in the last 30 days that are onboarded, against onboarded plus onboarding-eligible devices. Azure virtual machines reporting to endpoint detection: Azure virtual machines seen in the last 30 days. Real-time anti-malware protection enabled: Devices compliant with the real-time protection configuration checks, all platforms. Tamper protection enforced on onboarded devices: Onboarded devices seen in the last 30 days with tamper protection on. Host firewall enforced through endpoint policy: Onboarded devices with Microsoft Defender Firewall on for every profile. Operating system findings remediated within the patch cadence: Machines assessed by Update Manager with no critical or security patch older than the agreed cadence.</a:t>
+              <a:t>Endpoint and workload, foundational controls. These are configured when the environment is built and are expected at E at every review. Azure virtual machines reporting to endpoint detection: Azure virtual machines seen in the last 7 days that are onboarded to Defender for Endpoint or covered by another endpoint detection product, against the machines eligible for endpoint detection. Workstations, laptops and other endpoints that are not Azure resources are not part of this measure. Real-time anti-malware protection enabled: Azure virtual machines compliant with the real-time protection configuration checks, all platforms. Tamper protection enforced on Azure virtual machines: Onboarded Azure virtual machines seen in the last 30 days with tamper protection on. Host firewall enforced through endpoint policy: Onboarded Azure virtual machines with Microsoft Defender Firewall on for every profile. Operating system findings remediated within the patch cadence: Machines assessed by Update Manager with no critical or security patch older than the agreed cadence.</a:t>
             </a:r>
             <a:endParaRPr lang="en-US" dirty="0"/>
           </a:p>
@@ -2069,7 +2069,7 @@
           <a:p>
             <a:r>
               <a:rPr lang="en-US" dirty="0"/>
-              <a:t>Endpoint and workload, defense in depth controls. Each of these waits on something the client approves, schedules or licenses, and is sequenced on the roadmap. Vulnerability assessment running on onboarded devices: Onboarded devices with a vulnerability assessment result. Platform integrity through Trusted Launch: Azure virtual machines deployed with Trusted Launch or confidential computing. Encryption at host on virtual machines: Virtual machine and scale set resources with the encryption at host setting. Disk encryption alternatives are reviewed separately. Credential protection enforced: Onboarded Windows devices with LSA protection on and WDigest credential caching off. Remote Desktop hardened with TLS and Network Level Authentication: Onboarded Windows devices requiring TLS and Network Level Authentication for Remote Desktop. Application allow-listing policy assigned: An App Control for Business policy assigned in Intune.</a:t>
+              <a:t>Endpoint and workload, defense in depth controls. Each of these waits on something the client approves, schedules or licenses, and is sequenced on the roadmap. Vulnerability assessment running on onboarded Azure virtual machines: Onboarded Azure virtual machines with a vulnerability assessment result. Platform integrity through Trusted Launch: Azure virtual machines deployed with Trusted Launch or confidential computing. Encryption at host on virtual machines: Virtual machine and scale set resources with the encryption at host setting. Disk encryption alternatives are reviewed separately. Credential protection enforced: Onboarded Windows virtual machines with LSA protection on and WDigest credential caching off. Remote Desktop hardened with TLS and Network Level Authentication: Onboarded Windows virtual machines requiring TLS and Network Level Authentication for Remote Desktop. Application allow-listing policy assigned: An App Control for Business policy assigned in Intune.</a:t>
             </a:r>
             <a:endParaRPr lang="en-US" dirty="0"/>
           </a:p>
@@ -2157,7 +2157,7 @@
           <a:p>
             <a:r>
               <a:rPr lang="en-US" dirty="0"/>
-              <a:t>Network and boundary, foundational controls. These are configured when the environment is built and are expected at E at every review. Encryption in transit enforced on published web apps: Web and function apps with the HTTPS-only setting. Transport encryption enforced on Azure SQL: Azure SQL servers requiring TLS 1.2 or newer. App Service minimum TLS 1.2: App Service configurations requiring TLS 1.2 or newer. Anonymous blob access disabled: Storage accounts with account-level anonymous access disabled. Network protection active for egress and DNS monitoring: Onboarded Windows devices with network protection in block mode. The Sentinel tunneling and beaconing rules are confirmed in the review worksheet.</a:t>
+              <a:t>Network and boundary, foundational controls. These are configured when the environment is built and are expected at E at every review. Encryption in transit enforced on published web apps: Web and function apps with the HTTPS-only setting. Transport encryption enforced on Azure SQL: Azure SQL servers requiring TLS 1.2 or newer. App Service minimum TLS 1.2: App Service configurations requiring TLS 1.2 or newer. Anonymous blob access disabled: Storage accounts with account-level anonymous access disabled. Network protection in block mode on Azure virtual machines: Onboarded Windows virtual machines in Azure with network protection in block mode, which covers egress and DNS monitoring. The Sentinel tunneling and beaconing rules are confirmed in the review worksheet.</a:t>
             </a:r>
             <a:endParaRPr lang="en-US" dirty="0"/>
           </a:p>
@@ -2525,7 +2525,7 @@
       </p:grpSpPr>
       <p:pic>
         <p:nvPicPr>
-          <p:cNvPr id="2" name="Image 0" descr="/Users/nexus/Projects/Client_Facing_Tickets/scripts/EBR_Evidence_Gathering/report/assets/deck-band.jpg">    </p:cNvPr>
+          <p:cNvPr id="2" name="Image 0" descr="/home/user/EBR_Creation/report/assets/deck-band.jpg">    </p:cNvPr>
           <p:cNvPicPr>
             <a:picLocks noChangeAspect="1"/>
           </p:cNvPicPr>
@@ -3424,7 +3424,7 @@
                   <a:schemeClr val="accent1"/>
                 </a:solidFill>
               </a:rPr>
-              <a:t>Version Oct 12, 2026 · 32 foundational and 22 defense in depth controls across five pillars</a:t>
+              <a:t>Version Oct 12, 2026 · 31 foundational and 22 defense in depth controls across five pillars</a:t>
             </a:r>
             <a:endParaRPr lang="en-US" sz="1400" dirty="0"/>
           </a:p>
@@ -4005,7 +4005,7 @@
                   <a:schemeClr val="accent6"/>
                 </a:solidFill>
               </a:rPr>
-              <a:t>Domain controllers requiring LDAP server signing and channel binding.</a:t>
+              <a:t>Domain controllers in Azure requiring LDAP server signing and channel binding.</a:t>
             </a:r>
             <a:endParaRPr lang="en-US" sz="1400" dirty="0"/>
           </a:p>
@@ -4125,7 +4125,7 @@
                   <a:schemeClr val="accent6"/>
                 </a:solidFill>
               </a:rPr>
-              <a:t>Onboarded Windows devices sending NTLMv2 responses only.</a:t>
+              <a:t>Onboarded Windows virtual machines in Azure sending NTLMv2 responses only.</a:t>
             </a:r>
             <a:endParaRPr lang="en-US" sz="1400" dirty="0"/>
           </a:p>
@@ -6003,11 +6003,11 @@
         <p:spPr>
           <a:xfrm>
             <a:off x="548640" y="1600200"/>
-            <a:ext cx="3515258" cy="1860804"/>
+            <a:ext cx="3515258" cy="2226564"/>
           </a:xfrm>
           <a:prstGeom prst="roundRect">
             <a:avLst>
-              <a:gd name="adj" fmla="val 3931"/>
+              <a:gd name="adj" fmla="val 3285"/>
             </a:avLst>
           </a:prstGeom>
           <a:solidFill>
@@ -6063,14 +6063,14 @@
       </p:sp>
       <p:sp>
         <p:nvSpPr>
-          <p:cNvPr id="6" name="F1 Endpoint sensors active on Azure virtual machines"/>
+          <p:cNvPr id="6" name="F1 Endpoint sensors active on onboarded Azure virtual machines"/>
           <p:cNvSpPr txBox="1"/>
           <p:nvPr/>
         </p:nvSpPr>
         <p:spPr>
           <a:xfrm>
             <a:off x="1371600" y="1783080"/>
-            <a:ext cx="2527706" cy="1568196"/>
+            <a:ext cx="2527706" cy="1933956"/>
           </a:xfrm>
           <a:prstGeom prst="rect">
             <a:avLst/>
@@ -6091,7 +6091,7 @@
                   <a:schemeClr val="tx2"/>
                 </a:solidFill>
               </a:rPr>
-              <a:t>Endpoint sensors active on Azure virtual machines</a:t>
+              <a:t>Endpoint sensors active on onboarded Azure virtual machines</a:t>
             </a:r>
             <a:endParaRPr lang="en-US" sz="1400" dirty="0"/>
           </a:p>
@@ -6108,7 +6108,7 @@
                   <a:schemeClr val="accent6"/>
                 </a:solidFill>
               </a:rPr>
-              <a:t>Active sensors among onboarded Azure virtual machines seen in the last 30 days. Workstations and network devices such as firewalls are not part of this measure.</a:t>
+              <a:t>Active sensors among the Azure virtual machines onboarded to Defender for Endpoint, seen in the last 7 days. Workstations and network devices such as firewalls are not part of this measure.</a:t>
             </a:r>
             <a:endParaRPr lang="en-US" sz="1400" dirty="0"/>
           </a:p>
@@ -6123,11 +6123,11 @@
         <p:spPr>
           <a:xfrm>
             <a:off x="4338218" y="1600200"/>
-            <a:ext cx="3515258" cy="1860804"/>
+            <a:ext cx="3515258" cy="2226564"/>
           </a:xfrm>
           <a:prstGeom prst="roundRect">
             <a:avLst>
-              <a:gd name="adj" fmla="val 3931"/>
+              <a:gd name="adj" fmla="val 3285"/>
             </a:avLst>
           </a:prstGeom>
           <a:solidFill>
@@ -6190,7 +6190,7 @@
         <p:spPr>
           <a:xfrm>
             <a:off x="5161178" y="1783080"/>
-            <a:ext cx="2527706" cy="1568196"/>
+            <a:ext cx="2527706" cy="1933956"/>
           </a:xfrm>
           <a:prstGeom prst="rect">
             <a:avLst/>
@@ -6243,11 +6243,11 @@
         <p:spPr>
           <a:xfrm>
             <a:off x="8127797" y="1600200"/>
-            <a:ext cx="3515258" cy="1860804"/>
+            <a:ext cx="3515258" cy="2226564"/>
           </a:xfrm>
           <a:prstGeom prst="roundRect">
             <a:avLst>
-              <a:gd name="adj" fmla="val 3931"/>
+              <a:gd name="adj" fmla="val 3285"/>
             </a:avLst>
           </a:prstGeom>
           <a:solidFill>
@@ -6310,7 +6310,7 @@
         <p:spPr>
           <a:xfrm>
             <a:off x="8950757" y="1783080"/>
-            <a:ext cx="2527706" cy="1568196"/>
+            <a:ext cx="2527706" cy="1933956"/>
           </a:xfrm>
           <a:prstGeom prst="rect">
             <a:avLst/>
@@ -6362,12 +6362,12 @@
         </p:nvSpPr>
         <p:spPr>
           <a:xfrm>
-            <a:off x="548640" y="3735324"/>
-            <a:ext cx="3515258" cy="1860804"/>
+            <a:off x="548640" y="4101084"/>
+            <a:ext cx="3515258" cy="2226564"/>
           </a:xfrm>
           <a:prstGeom prst="roundRect">
             <a:avLst>
-              <a:gd name="adj" fmla="val 3931"/>
+              <a:gd name="adj" fmla="val 3285"/>
             </a:avLst>
           </a:prstGeom>
           <a:solidFill>
@@ -6389,7 +6389,7 @@
         </p:nvSpPr>
         <p:spPr>
           <a:xfrm>
-            <a:off x="731520" y="3936492"/>
+            <a:off x="731520" y="4302252"/>
             <a:ext cx="502920" cy="329184"/>
           </a:xfrm>
           <a:prstGeom prst="roundRect">
@@ -6429,8 +6429,8 @@
         </p:nvSpPr>
         <p:spPr>
           <a:xfrm>
-            <a:off x="1371600" y="3918204"/>
-            <a:ext cx="2527706" cy="1568196"/>
+            <a:off x="1371600" y="4283964"/>
+            <a:ext cx="2527706" cy="1933956"/>
           </a:xfrm>
           <a:prstGeom prst="rect">
             <a:avLst/>
@@ -6482,12 +6482,12 @@
         </p:nvSpPr>
         <p:spPr>
           <a:xfrm>
-            <a:off x="4338218" y="3735324"/>
-            <a:ext cx="3515258" cy="1860804"/>
+            <a:off x="4338218" y="4101084"/>
+            <a:ext cx="3515258" cy="2226564"/>
           </a:xfrm>
           <a:prstGeom prst="roundRect">
             <a:avLst>
-              <a:gd name="adj" fmla="val 3931"/>
+              <a:gd name="adj" fmla="val 3285"/>
             </a:avLst>
           </a:prstGeom>
           <a:solidFill>
@@ -6509,7 +6509,7 @@
         </p:nvSpPr>
         <p:spPr>
           <a:xfrm>
-            <a:off x="4521098" y="3936492"/>
+            <a:off x="4521098" y="4302252"/>
             <a:ext cx="502920" cy="329184"/>
           </a:xfrm>
           <a:prstGeom prst="roundRect">
@@ -6549,8 +6549,8 @@
         </p:nvSpPr>
         <p:spPr>
           <a:xfrm>
-            <a:off x="5161178" y="3918204"/>
-            <a:ext cx="2527706" cy="1568196"/>
+            <a:off x="5161178" y="4283964"/>
+            <a:ext cx="2527706" cy="1933956"/>
           </a:xfrm>
           <a:prstGeom prst="rect">
             <a:avLst/>
@@ -6602,12 +6602,12 @@
         </p:nvSpPr>
         <p:spPr>
           <a:xfrm>
-            <a:off x="8127797" y="3735324"/>
-            <a:ext cx="3515258" cy="1860804"/>
+            <a:off x="8127797" y="4101084"/>
+            <a:ext cx="3515258" cy="2226564"/>
           </a:xfrm>
           <a:prstGeom prst="roundRect">
             <a:avLst>
-              <a:gd name="adj" fmla="val 3931"/>
+              <a:gd name="adj" fmla="val 3285"/>
             </a:avLst>
           </a:prstGeom>
           <a:solidFill>
@@ -6629,7 +6629,7 @@
         </p:nvSpPr>
         <p:spPr>
           <a:xfrm>
-            <a:off x="8310677" y="3936492"/>
+            <a:off x="8310677" y="4302252"/>
             <a:ext cx="502920" cy="329184"/>
           </a:xfrm>
           <a:prstGeom prst="roundRect">
@@ -6669,8 +6669,8 @@
         </p:nvSpPr>
         <p:spPr>
           <a:xfrm>
-            <a:off x="8950757" y="3918204"/>
-            <a:ext cx="2527706" cy="1568196"/>
+            <a:off x="8950757" y="4283964"/>
+            <a:ext cx="2527706" cy="1933956"/>
           </a:xfrm>
           <a:prstGeom prst="rect">
             <a:avLst/>
@@ -8688,7 +8688,7 @@
                   <a:schemeClr val="bg2"/>
                 </a:solidFill>
               </a:rPr>
-              <a:t>54 controls across five pillars</a:t>
+              <a:t>53 controls across five pillars</a:t>
             </a:r>
             <a:endParaRPr lang="en-US" sz="1600" dirty="0"/>
           </a:p>
@@ -8767,7 +8767,7 @@
                   <a:schemeClr val="tx2"/>
                 </a:solidFill>
               </a:rPr>
-              <a:t>54</a:t>
+              <a:t>53</a:t>
             </a:r>
             <a:endParaRPr lang="en-US" sz="4800" dirty="0"/>
           </a:p>
@@ -8844,7 +8844,7 @@
                   <a:schemeClr val="accent2"/>
                 </a:solidFill>
               </a:rPr>
-              <a:t>32</a:t>
+              <a:t>31</a:t>
             </a:r>
             <a:endParaRPr lang="en-US" sz="4800" dirty="0"/>
           </a:p>
@@ -10438,7 +10438,7 @@
                   <a:schemeClr val="bg2"/>
                 </a:solidFill>
               </a:rPr>
-              <a:t>Foundational · 6 controls · Configured at build and held at E at every review</a:t>
+              <a:t>Foundational · 5 controls · Configured at build and held at E at every review</a:t>
             </a:r>
             <a:endParaRPr lang="en-US" sz="1600" dirty="0"/>
           </a:p>
@@ -10453,11 +10453,11 @@
         <p:spPr>
           <a:xfrm>
             <a:off x="548640" y="1600200"/>
-            <a:ext cx="3515258" cy="1677924"/>
+            <a:ext cx="3515258" cy="2331720"/>
           </a:xfrm>
           <a:prstGeom prst="roundRect">
             <a:avLst>
-              <a:gd name="adj" fmla="val 4360"/>
+              <a:gd name="adj" fmla="val 3137"/>
             </a:avLst>
           </a:prstGeom>
           <a:solidFill>
@@ -10513,14 +10513,14 @@
       </p:sp>
       <p:sp>
         <p:nvSpPr>
-          <p:cNvPr id="6" name="F1 Endpoint detection and response deployed"/>
+          <p:cNvPr id="6" name="F1 Azure virtual machines reporting to endpoint detection"/>
           <p:cNvSpPr txBox="1"/>
           <p:nvPr/>
         </p:nvSpPr>
         <p:spPr>
           <a:xfrm>
             <a:off x="1371600" y="1783080"/>
-            <a:ext cx="2527706" cy="1385316"/>
+            <a:ext cx="2527706" cy="2039112"/>
           </a:xfrm>
           <a:prstGeom prst="rect">
             <a:avLst/>
@@ -10541,7 +10541,7 @@
                   <a:schemeClr val="tx2"/>
                 </a:solidFill>
               </a:rPr>
-              <a:t>Endpoint detection and response deployed</a:t>
+              <a:t>Azure virtual machines reporting to endpoint detection</a:t>
             </a:r>
             <a:endParaRPr lang="en-US" sz="1400" dirty="0"/>
           </a:p>
@@ -10558,7 +10558,7 @@
                   <a:schemeClr val="accent6"/>
                 </a:solidFill>
               </a:rPr>
-              <a:t>Devices seen in the last 30 days that are onboarded, against onboarded plus onboarding-eligible devices.</a:t>
+              <a:t>Azure virtual machines seen in the last 7 days that are onboarded to Defender for Endpoint or covered by another endpoint detection product, against the machines eligible for endpoint detection. Workstations, laptops and other endpoints that are not Azure resources are not part of this measure.</a:t>
             </a:r>
             <a:endParaRPr lang="en-US" sz="1400" dirty="0"/>
           </a:p>
@@ -10573,11 +10573,11 @@
         <p:spPr>
           <a:xfrm>
             <a:off x="4338218" y="1600200"/>
-            <a:ext cx="3515258" cy="1677924"/>
+            <a:ext cx="3515258" cy="2331720"/>
           </a:xfrm>
           <a:prstGeom prst="roundRect">
             <a:avLst>
-              <a:gd name="adj" fmla="val 4360"/>
+              <a:gd name="adj" fmla="val 3137"/>
             </a:avLst>
           </a:prstGeom>
           <a:solidFill>
@@ -10633,14 +10633,14 @@
       </p:sp>
       <p:sp>
         <p:nvSpPr>
-          <p:cNvPr id="9" name="F2 Azure virtual machines reporting to endpoint detection"/>
+          <p:cNvPr id="9" name="F2 Real-time anti-malware protection enabled"/>
           <p:cNvSpPr txBox="1"/>
           <p:nvPr/>
         </p:nvSpPr>
         <p:spPr>
           <a:xfrm>
             <a:off x="5161178" y="1783080"/>
-            <a:ext cx="2527706" cy="1385316"/>
+            <a:ext cx="2527706" cy="2039112"/>
           </a:xfrm>
           <a:prstGeom prst="rect">
             <a:avLst/>
@@ -10661,7 +10661,7 @@
                   <a:schemeClr val="tx2"/>
                 </a:solidFill>
               </a:rPr>
-              <a:t>Azure virtual machines reporting to endpoint detection</a:t>
+              <a:t>Real-time anti-malware protection enabled</a:t>
             </a:r>
             <a:endParaRPr lang="en-US" sz="1400" dirty="0"/>
           </a:p>
@@ -10678,7 +10678,7 @@
                   <a:schemeClr val="accent6"/>
                 </a:solidFill>
               </a:rPr>
-              <a:t>Azure virtual machines seen in the last 30 days.</a:t>
+              <a:t>Azure virtual machines compliant with the real-time protection configuration checks, all platforms.</a:t>
             </a:r>
             <a:endParaRPr lang="en-US" sz="1400" dirty="0"/>
           </a:p>
@@ -10693,11 +10693,11 @@
         <p:spPr>
           <a:xfrm>
             <a:off x="8127797" y="1600200"/>
-            <a:ext cx="3515258" cy="1677924"/>
+            <a:ext cx="3515258" cy="2331720"/>
           </a:xfrm>
           <a:prstGeom prst="roundRect">
             <a:avLst>
-              <a:gd name="adj" fmla="val 4360"/>
+              <a:gd name="adj" fmla="val 3137"/>
             </a:avLst>
           </a:prstGeom>
           <a:solidFill>
@@ -10753,14 +10753,14 @@
       </p:sp>
       <p:sp>
         <p:nvSpPr>
-          <p:cNvPr id="12" name="F3 Real-time anti-malware protection enabled"/>
+          <p:cNvPr id="12" name="F3 Tamper protection enforced on Azure virtual machines"/>
           <p:cNvSpPr txBox="1"/>
           <p:nvPr/>
         </p:nvSpPr>
         <p:spPr>
           <a:xfrm>
             <a:off x="8950757" y="1783080"/>
-            <a:ext cx="2527706" cy="1385316"/>
+            <a:ext cx="2527706" cy="2039112"/>
           </a:xfrm>
           <a:prstGeom prst="rect">
             <a:avLst/>
@@ -10781,7 +10781,7 @@
                   <a:schemeClr val="tx2"/>
                 </a:solidFill>
               </a:rPr>
-              <a:t>Real-time anti-malware protection enabled</a:t>
+              <a:t>Tamper protection enforced on Azure virtual machines</a:t>
             </a:r>
             <a:endParaRPr lang="en-US" sz="1400" dirty="0"/>
           </a:p>
@@ -10798,7 +10798,7 @@
                   <a:schemeClr val="accent6"/>
                 </a:solidFill>
               </a:rPr>
-              <a:t>Devices compliant with the real-time protection configuration checks, all platforms.</a:t>
+              <a:t>Onboarded Azure virtual machines seen in the last 30 days with tamper protection on.</a:t>
             </a:r>
             <a:endParaRPr lang="en-US" sz="1400" dirty="0"/>
           </a:p>
@@ -10812,12 +10812,12 @@
         </p:nvSpPr>
         <p:spPr>
           <a:xfrm>
-            <a:off x="548640" y="3552444"/>
-            <a:ext cx="3515258" cy="1677924"/>
+            <a:off x="548640" y="4206240"/>
+            <a:ext cx="3515258" cy="2331720"/>
           </a:xfrm>
           <a:prstGeom prst="roundRect">
             <a:avLst>
-              <a:gd name="adj" fmla="val 4360"/>
+              <a:gd name="adj" fmla="val 3137"/>
             </a:avLst>
           </a:prstGeom>
           <a:solidFill>
@@ -10839,7 +10839,7 @@
         </p:nvSpPr>
         <p:spPr>
           <a:xfrm>
-            <a:off x="731520" y="3753612"/>
+            <a:off x="731520" y="4407408"/>
             <a:ext cx="502920" cy="329184"/>
           </a:xfrm>
           <a:prstGeom prst="roundRect">
@@ -10873,14 +10873,14 @@
       </p:sp>
       <p:sp>
         <p:nvSpPr>
-          <p:cNvPr id="15" name="F4 Tamper protection enforced on onboarded devices"/>
-          <p:cNvSpPr txBox="1"/>
-          <p:nvPr/>
-        </p:nvSpPr>
-        <p:spPr>
-          <a:xfrm>
-            <a:off x="1371600" y="3735324"/>
-            <a:ext cx="2527706" cy="1385316"/>
+          <p:cNvPr id="15" name="F4 Host firewall enforced through endpoint policy"/>
+          <p:cNvSpPr txBox="1"/>
+          <p:nvPr/>
+        </p:nvSpPr>
+        <p:spPr>
+          <a:xfrm>
+            <a:off x="1371600" y="4389120"/>
+            <a:ext cx="2527706" cy="2039112"/>
           </a:xfrm>
           <a:prstGeom prst="rect">
             <a:avLst/>
@@ -10901,7 +10901,7 @@
                   <a:schemeClr val="tx2"/>
                 </a:solidFill>
               </a:rPr>
-              <a:t>Tamper protection enforced on onboarded devices</a:t>
+              <a:t>Host firewall enforced through endpoint policy</a:t>
             </a:r>
             <a:endParaRPr lang="en-US" sz="1400" dirty="0"/>
           </a:p>
@@ -10918,7 +10918,7 @@
                   <a:schemeClr val="accent6"/>
                 </a:solidFill>
               </a:rPr>
-              <a:t>Onboarded devices seen in the last 30 days with tamper protection on.</a:t>
+              <a:t>Onboarded Azure virtual machines with Microsoft Defender Firewall on for every profile.</a:t>
             </a:r>
             <a:endParaRPr lang="en-US" sz="1400" dirty="0"/>
           </a:p>
@@ -10932,12 +10932,12 @@
         </p:nvSpPr>
         <p:spPr>
           <a:xfrm>
-            <a:off x="4338218" y="3552444"/>
-            <a:ext cx="3515258" cy="1677924"/>
+            <a:off x="4338218" y="4206240"/>
+            <a:ext cx="3515258" cy="2331720"/>
           </a:xfrm>
           <a:prstGeom prst="roundRect">
             <a:avLst>
-              <a:gd name="adj" fmla="val 4360"/>
+              <a:gd name="adj" fmla="val 3137"/>
             </a:avLst>
           </a:prstGeom>
           <a:solidFill>
@@ -10959,7 +10959,7 @@
         </p:nvSpPr>
         <p:spPr>
           <a:xfrm>
-            <a:off x="4521098" y="3753612"/>
+            <a:off x="4521098" y="4407408"/>
             <a:ext cx="502920" cy="329184"/>
           </a:xfrm>
           <a:prstGeom prst="roundRect">
@@ -10993,134 +10993,14 @@
       </p:sp>
       <p:sp>
         <p:nvSpPr>
-          <p:cNvPr id="18" name="F5 Host firewall enforced through endpoint policy"/>
-          <p:cNvSpPr txBox="1"/>
-          <p:nvPr/>
-        </p:nvSpPr>
-        <p:spPr>
-          <a:xfrm>
-            <a:off x="5161178" y="3735324"/>
-            <a:ext cx="2527706" cy="1385316"/>
-          </a:xfrm>
-          <a:prstGeom prst="rect">
-            <a:avLst/>
-          </a:prstGeom>
-          <a:noFill/>
-          <a:ln/>
-        </p:spPr>
-        <p:txBody>
-          <a:bodyPr wrap="square" lIns="0" tIns="0" rIns="0" bIns="0" rtlCol="0" anchor="t"/>
-          <a:lstStyle/>
-          <a:p>
-            <a:pPr indent="0" marL="0">
-              <a:buNone/>
-            </a:pPr>
-            <a:r>
-              <a:rPr lang="en-US" sz="1400" b="1" dirty="0">
-                <a:solidFill>
-                  <a:schemeClr val="tx2"/>
-                </a:solidFill>
-              </a:rPr>
-              <a:t>Host firewall enforced through endpoint policy</a:t>
-            </a:r>
-            <a:endParaRPr lang="en-US" sz="1400" dirty="0"/>
-          </a:p>
-          <a:p>
-            <a:pPr indent="0" marL="0">
-              <a:spcBef>
-                <a:spcPts val="500"/>
-              </a:spcBef>
-              <a:buNone/>
-            </a:pPr>
-            <a:r>
-              <a:rPr lang="en-US" sz="1200" dirty="0">
-                <a:solidFill>
-                  <a:schemeClr val="accent6"/>
-                </a:solidFill>
-              </a:rPr>
-              <a:t>Onboarded devices with Microsoft Defender Firewall on for every profile.</a:t>
-            </a:r>
-            <a:endParaRPr lang="en-US" sz="1400" dirty="0"/>
-          </a:p>
-        </p:txBody>
-      </p:sp>
-      <p:sp>
-        <p:nvSpPr>
-          <p:cNvPr id="19" name="F6 card"/>
-          <p:cNvSpPr/>
-          <p:nvPr/>
-        </p:nvSpPr>
-        <p:spPr>
-          <a:xfrm>
-            <a:off x="8127797" y="3552444"/>
-            <a:ext cx="3515258" cy="1677924"/>
-          </a:xfrm>
-          <a:prstGeom prst="roundRect">
-            <a:avLst>
-              <a:gd name="adj" fmla="val 4360"/>
-            </a:avLst>
-          </a:prstGeom>
-          <a:solidFill>
-            <a:schemeClr val="bg2"/>
-          </a:solidFill>
-          <a:ln w="12700">
-            <a:solidFill>
-              <a:schemeClr val="bg2"/>
-            </a:solidFill>
-            <a:prstDash val="solid"/>
-          </a:ln>
-        </p:spPr>
-      </p:sp>
-      <p:sp>
-        <p:nvSpPr>
-          <p:cNvPr id="20" name="F6 tag"/>
-          <p:cNvSpPr txBox="1"/>
-          <p:nvPr/>
-        </p:nvSpPr>
-        <p:spPr>
-          <a:xfrm>
-            <a:off x="8310677" y="3753612"/>
-            <a:ext cx="502920" cy="329184"/>
-          </a:xfrm>
-          <a:prstGeom prst="roundRect">
-            <a:avLst>
-              <a:gd name="adj" fmla="val 16667"/>
-            </a:avLst>
-          </a:prstGeom>
-          <a:solidFill>
-            <a:schemeClr val="accent2"/>
-          </a:solidFill>
-          <a:ln/>
-        </p:spPr>
-        <p:txBody>
-          <a:bodyPr wrap="square" lIns="0" tIns="0" rIns="0" bIns="0" rtlCol="0" anchor="ctr"/>
-          <a:lstStyle/>
-          <a:p>
-            <a:pPr algn="ctr" indent="0" marL="0">
-              <a:buNone/>
-            </a:pPr>
-            <a:r>
-              <a:rPr lang="en-US" sz="1300" b="1" dirty="0">
-                <a:solidFill>
-                  <a:schemeClr val="bg1"/>
-                </a:solidFill>
-              </a:rPr>
-              <a:t>F6</a:t>
-            </a:r>
-            <a:endParaRPr lang="en-US" sz="1300" dirty="0"/>
-          </a:p>
-        </p:txBody>
-      </p:sp>
-      <p:sp>
-        <p:nvSpPr>
-          <p:cNvPr id="21" name="F6 Operating system findings remediated within the patch cadence"/>
-          <p:cNvSpPr txBox="1"/>
-          <p:nvPr/>
-        </p:nvSpPr>
-        <p:spPr>
-          <a:xfrm>
-            <a:off x="8950757" y="3735324"/>
-            <a:ext cx="2527706" cy="1385316"/>
+          <p:cNvPr id="18" name="F5 Operating system findings remediated within the patch cadence"/>
+          <p:cNvSpPr txBox="1"/>
+          <p:nvPr/>
+        </p:nvSpPr>
+        <p:spPr>
+          <a:xfrm>
+            <a:off x="5161178" y="4389120"/>
+            <a:ext cx="2527706" cy="2039112"/>
           </a:xfrm>
           <a:prstGeom prst="rect">
             <a:avLst/>
@@ -11334,7 +11214,7 @@
       </p:sp>
       <p:sp>
         <p:nvSpPr>
-          <p:cNvPr id="6" name="D1 Vulnerability assessment running on onboarded devices"/>
+          <p:cNvPr id="6" name="D1 Vulnerability assessment running on onboarded Azure virtual machines"/>
           <p:cNvSpPr txBox="1"/>
           <p:nvPr/>
         </p:nvSpPr>
@@ -11362,7 +11242,7 @@
                   <a:schemeClr val="tx2"/>
                 </a:solidFill>
               </a:rPr>
-              <a:t>Vulnerability assessment running on onboarded devices</a:t>
+              <a:t>Vulnerability assessment running on onboarded Azure virtual machines</a:t>
             </a:r>
             <a:endParaRPr lang="en-US" sz="1400" dirty="0"/>
           </a:p>
@@ -11379,7 +11259,7 @@
                   <a:schemeClr val="accent6"/>
                 </a:solidFill>
               </a:rPr>
-              <a:t>Onboarded devices with a vulnerability assessment result.</a:t>
+              <a:t>Onboarded Azure virtual machines with a vulnerability assessment result.</a:t>
             </a:r>
             <a:endParaRPr lang="en-US" sz="1400" dirty="0"/>
           </a:p>
@@ -11739,7 +11619,7 @@
                   <a:schemeClr val="accent6"/>
                 </a:solidFill>
               </a:rPr>
-              <a:t>Onboarded Windows devices with LSA protection on and WDigest credential caching off.</a:t>
+              <a:t>Onboarded Windows virtual machines with LSA protection on and WDigest credential caching off.</a:t>
             </a:r>
             <a:endParaRPr lang="en-US" sz="1400" dirty="0"/>
           </a:p>
@@ -11859,7 +11739,7 @@
                   <a:schemeClr val="accent6"/>
                 </a:solidFill>
               </a:rPr>
-              <a:t>Onboarded Windows devices requiring TLS and Network Level Authentication for Remote Desktop.</a:t>
+              <a:t>Onboarded Windows virtual machines requiring TLS and Network Level Authentication for Remote Desktop.</a:t>
             </a:r>
             <a:endParaRPr lang="en-US" sz="1400" dirty="0"/>
           </a:p>
@@ -12095,11 +11975,11 @@
         <p:spPr>
           <a:xfrm>
             <a:off x="548640" y="1600200"/>
-            <a:ext cx="3515258" cy="2043684"/>
+            <a:ext cx="3515258" cy="2226564"/>
           </a:xfrm>
           <a:prstGeom prst="roundRect">
             <a:avLst>
-              <a:gd name="adj" fmla="val 3579"/>
+              <a:gd name="adj" fmla="val 3285"/>
             </a:avLst>
           </a:prstGeom>
           <a:solidFill>
@@ -12162,7 +12042,7 @@
         <p:spPr>
           <a:xfrm>
             <a:off x="1371600" y="1783080"/>
-            <a:ext cx="2527706" cy="1751076"/>
+            <a:ext cx="2527706" cy="1933956"/>
           </a:xfrm>
           <a:prstGeom prst="rect">
             <a:avLst/>
@@ -12215,11 +12095,11 @@
         <p:spPr>
           <a:xfrm>
             <a:off x="4338218" y="1600200"/>
-            <a:ext cx="3515258" cy="2043684"/>
+            <a:ext cx="3515258" cy="2226564"/>
           </a:xfrm>
           <a:prstGeom prst="roundRect">
             <a:avLst>
-              <a:gd name="adj" fmla="val 3579"/>
+              <a:gd name="adj" fmla="val 3285"/>
             </a:avLst>
           </a:prstGeom>
           <a:solidFill>
@@ -12282,7 +12162,7 @@
         <p:spPr>
           <a:xfrm>
             <a:off x="5161178" y="1783080"/>
-            <a:ext cx="2527706" cy="1751076"/>
+            <a:ext cx="2527706" cy="1933956"/>
           </a:xfrm>
           <a:prstGeom prst="rect">
             <a:avLst/>
@@ -12335,11 +12215,11 @@
         <p:spPr>
           <a:xfrm>
             <a:off x="8127797" y="1600200"/>
-            <a:ext cx="3515258" cy="2043684"/>
+            <a:ext cx="3515258" cy="2226564"/>
           </a:xfrm>
           <a:prstGeom prst="roundRect">
             <a:avLst>
-              <a:gd name="adj" fmla="val 3579"/>
+              <a:gd name="adj" fmla="val 3285"/>
             </a:avLst>
           </a:prstGeom>
           <a:solidFill>
@@ -12402,7 +12282,7 @@
         <p:spPr>
           <a:xfrm>
             <a:off x="8950757" y="1783080"/>
-            <a:ext cx="2527706" cy="1751076"/>
+            <a:ext cx="2527706" cy="1933956"/>
           </a:xfrm>
           <a:prstGeom prst="rect">
             <a:avLst/>
@@ -12454,12 +12334,12 @@
         </p:nvSpPr>
         <p:spPr>
           <a:xfrm>
-            <a:off x="548640" y="3918204"/>
-            <a:ext cx="3515258" cy="2043684"/>
+            <a:off x="548640" y="4101084"/>
+            <a:ext cx="3515258" cy="2226564"/>
           </a:xfrm>
           <a:prstGeom prst="roundRect">
             <a:avLst>
-              <a:gd name="adj" fmla="val 3579"/>
+              <a:gd name="adj" fmla="val 3285"/>
             </a:avLst>
           </a:prstGeom>
           <a:solidFill>
@@ -12481,7 +12361,7 @@
         </p:nvSpPr>
         <p:spPr>
           <a:xfrm>
-            <a:off x="731520" y="4119372"/>
+            <a:off x="731520" y="4302252"/>
             <a:ext cx="502920" cy="329184"/>
           </a:xfrm>
           <a:prstGeom prst="roundRect">
@@ -12521,8 +12401,8 @@
         </p:nvSpPr>
         <p:spPr>
           <a:xfrm>
-            <a:off x="1371600" y="4101084"/>
-            <a:ext cx="2527706" cy="1751076"/>
+            <a:off x="1371600" y="4283964"/>
+            <a:ext cx="2527706" cy="1933956"/>
           </a:xfrm>
           <a:prstGeom prst="rect">
             <a:avLst/>
@@ -12574,12 +12454,12 @@
         </p:nvSpPr>
         <p:spPr>
           <a:xfrm>
-            <a:off x="4338218" y="3918204"/>
-            <a:ext cx="3515258" cy="2043684"/>
+            <a:off x="4338218" y="4101084"/>
+            <a:ext cx="3515258" cy="2226564"/>
           </a:xfrm>
           <a:prstGeom prst="roundRect">
             <a:avLst>
-              <a:gd name="adj" fmla="val 3579"/>
+              <a:gd name="adj" fmla="val 3285"/>
             </a:avLst>
           </a:prstGeom>
           <a:solidFill>
@@ -12601,7 +12481,7 @@
         </p:nvSpPr>
         <p:spPr>
           <a:xfrm>
-            <a:off x="4521098" y="4119372"/>
+            <a:off x="4521098" y="4302252"/>
             <a:ext cx="502920" cy="329184"/>
           </a:xfrm>
           <a:prstGeom prst="roundRect">
@@ -12635,14 +12515,14 @@
       </p:sp>
       <p:sp>
         <p:nvSpPr>
-          <p:cNvPr id="18" name="F5 Network protection active for egress and DNS monitoring"/>
-          <p:cNvSpPr txBox="1"/>
-          <p:nvPr/>
-        </p:nvSpPr>
-        <p:spPr>
-          <a:xfrm>
-            <a:off x="5161178" y="4101084"/>
-            <a:ext cx="2527706" cy="1751076"/>
+          <p:cNvPr id="18" name="F5 Network protection in block mode on Azure virtual machines"/>
+          <p:cNvSpPr txBox="1"/>
+          <p:nvPr/>
+        </p:nvSpPr>
+        <p:spPr>
+          <a:xfrm>
+            <a:off x="5161178" y="4283964"/>
+            <a:ext cx="2527706" cy="1933956"/>
           </a:xfrm>
           <a:prstGeom prst="rect">
             <a:avLst/>
@@ -12663,7 +12543,7 @@
                   <a:schemeClr val="tx2"/>
                 </a:solidFill>
               </a:rPr>
-              <a:t>Network protection active for egress and DNS monitoring</a:t>
+              <a:t>Network protection in block mode on Azure virtual machines</a:t>
             </a:r>
             <a:endParaRPr lang="en-US" sz="1400" dirty="0"/>
           </a:p>
@@ -12680,7 +12560,7 @@
                   <a:schemeClr val="accent6"/>
                 </a:solidFill>
               </a:rPr>
-              <a:t>Onboarded Windows devices with network protection in block mode. The Sentinel tunneling and beaconing rules are confirmed in the review worksheet.</a:t>
+              <a:t>Onboarded Windows virtual machines in Azure with network protection in block mode, which covers egress and DNS monitoring. The Sentinel tunneling and beaconing rules are confirmed in the review worksheet.</a:t>
             </a:r>
             <a:endParaRPr lang="en-US" sz="1400" dirty="0"/>
           </a:p>

--- a/docs/The Controls That Matter.pptx
+++ b/docs/The Controls That Matter.pptx
@@ -121,7 +121,7 @@
   <p:extLst>
     <p:ext uri="{521415D9-36F7-43E2-AB2F-B90AF26B5E84}">
       <p14:sectionLst xmlns:p14="http://schemas.microsoft.com/office/powerpoint/2010/main">
-        <p14:section name="Overview" id="{f03fb022-9087-d1fb-c5a1-f419678fbd7c}">
+        <p14:section name="Overview" id="{d9f0ad6d-f075-ff64-e781-d49d342b543e}">
           <p14:sldIdLst>
             <p14:sldId id="256"/>
             <p14:sldId id="257"/>
@@ -129,37 +129,37 @@
             <p14:sldId id="259"/>
           </p14:sldIdLst>
         </p14:section>
-        <p14:section name="Identity and access" id="{f97e0c09-3556-b4cf-2767-8ffec2aa440f}">
+        <p14:section name="Identity and access" id="{011da6e0-c1c1-a106-03b2-40566a47a735}">
           <p14:sldIdLst>
             <p14:sldId id="260"/>
             <p14:sldId id="261"/>
           </p14:sldIdLst>
         </p14:section>
-        <p14:section name="Endpoint and workload" id="{7e14017d-bc95-b596-7d49-051fa7382eb5}">
+        <p14:section name="Endpoint and workload" id="{4a029186-0a55-aed6-74df-f47d14242e4a}">
           <p14:sldIdLst>
             <p14:sldId id="262"/>
             <p14:sldId id="263"/>
           </p14:sldIdLst>
         </p14:section>
-        <p14:section name="Network and boundary" id="{b5a24a79-284e-aa39-f36e-3566c6199faa}">
+        <p14:section name="Network and boundary" id="{186d929f-8c49-5a25-c8aa-bad834a6cd31}">
           <p14:sldIdLst>
             <p14:sldId id="264"/>
             <p14:sldId id="265"/>
           </p14:sldIdLst>
         </p14:section>
-        <p14:section name="Data protection" id="{c7b46240-fbf0-d845-4a72-5351092d04b5}">
+        <p14:section name="Data protection" id="{cc1a25bf-b2d0-dd11-beba-d24ae51b6d4a}">
           <p14:sldIdLst>
             <p14:sldId id="266"/>
             <p14:sldId id="267"/>
           </p14:sldIdLst>
         </p14:section>
-        <p14:section name="Detection and response" id="{b1197866-a201-d873-ab55-7974f41c0d38}">
+        <p14:section name="Detection and response" id="{f04bdd99-17f9-da7e-d99d-105a81d68e19}">
           <p14:sldIdLst>
             <p14:sldId id="268"/>
             <p14:sldId id="269"/>
           </p14:sldIdLst>
         </p14:section>
-        <p14:section name="Feedback" id="{c06557e6-8ea5-9f41-48df-4619bee4bc5e}">
+        <p14:section name="Feedback" id="{920fdea2-7ba2-f8e0-f4d5-7f0a94820d08}">
           <p14:sldIdLst>
             <p14:sldId id="270"/>
           </p14:sldIdLst>
@@ -1277,7 +1277,7 @@
           <a:p>
             <a:r>
               <a:rPr lang="en-US" dirty="0"/>
-              <a:t>Detection and response, foundational controls. These are configured when the environment is built and are expected at E at every review. Endpoint sensors active on onboarded Azure virtual machines: Active sensors among the Azure virtual machines onboarded to Defender for Endpoint, seen in the last 7 days. Workstations and network devices such as firewalls are not part of this measure. Cloud workload protection across the resource estate: Eligible resources on a Standard Defender for Cloud plan. Subscription plan configuration, estimated. Domain controller telemetry collected continuously: Domain controller security events arriving in the workspace. Alerts closed with a documented disposition: Alerts closed in the last 30 days that carry a classification and a closing comment. Defender for Identity sensors healthy on domain controllers: Sensors reporting healthy, of sensors registered. Audit logging initiative compliant across its resources: Resources compliant with the ATMO-MXDR diagnostic logging initiative.</a:t>
+              <a:t>Detection and response, foundational controls. These are configured when the environment is built and are expected at E at every review. Endpoint sensors active on onboarded Azure virtual machines: Active sensors among the Azure virtual machines onboarded to Defender for Endpoint, seen in the last 7 days. Workstations and network devices such as firewalls are not part of this measure. Cloud workload protection across the resource estate: Eligible resources on a Standard Defender for Cloud plan, read from the subscription plan configuration. Analytics rules enabled in Sentinel: Enabled analytics rules across all workspaces. Threat intelligence indicators ingested tenant-wide: Threat intelligence indicators available for matching in the workspace. Alerts closed with a documented disposition: Alerts closed in the last 30 days that carry a classification and a closing comment. Audit logging initiative compliant across its resources: Resources compliant with the ATMO-MXDR diagnostic logging initiative.</a:t>
             </a:r>
             <a:endParaRPr lang="en-US" dirty="0"/>
           </a:p>
@@ -1365,7 +1365,7 @@
           <a:p>
             <a:r>
               <a:rPr lang="en-US" dirty="0"/>
-              <a:t>Detection and response, defense in depth controls. Each of these waits on something the client approves, schedules or licenses, and is sequenced on the roadmap. Analytics rules enabled in Sentinel: Enabled analytics rules across all workspaces. Threat intelligence indicators ingested tenant-wide: Threat intelligence indicators available for matching in the workspace. Diagnostic logging enabled on all platform resources: Resources with every diagnostic and audit logging assessment healthy.</a:t>
+              <a:t>Detection and response, defense in depth controls. Each of these waits on something the client approves, schedules or licenses, and is sequenced on the roadmap. Domain controller telemetry collected continuously: Domain controller security events arriving in the workspace. Defender for Identity sensors healthy on domain controllers: Sensors reporting healthy, of sensors registered. Diagnostic logging enabled on all platform resources: Resources with every diagnostic and audit logging assessment healthy.</a:t>
             </a:r>
             <a:endParaRPr lang="en-US" dirty="0"/>
           </a:p>
@@ -3424,7 +3424,7 @@
                   <a:schemeClr val="accent1"/>
                 </a:solidFill>
               </a:rPr>
-              <a:t>Version Oct 12, 2026 · 31 foundational and 22 defense in depth controls across five pillars</a:t>
+              <a:t>Version Oct 16, 2026 · 31 foundational and 22 defense in depth controls across five pillars</a:t>
             </a:r>
             <a:endParaRPr lang="en-US" sz="1400" dirty="0"/>
           </a:p>
@@ -6228,7 +6228,7 @@
                   <a:schemeClr val="accent6"/>
                 </a:solidFill>
               </a:rPr>
-              <a:t>Eligible resources on a Standard Defender for Cloud plan. Subscription plan configuration, estimated.</a:t>
+              <a:t>Eligible resources on a Standard Defender for Cloud plan, read from the subscription plan configuration.</a:t>
             </a:r>
             <a:endParaRPr lang="en-US" sz="1400" dirty="0"/>
           </a:p>
@@ -6303,7 +6303,7 @@
       </p:sp>
       <p:sp>
         <p:nvSpPr>
-          <p:cNvPr id="12" name="F3 Domain controller telemetry collected continuously"/>
+          <p:cNvPr id="12" name="F3 Analytics rules enabled in Sentinel"/>
           <p:cNvSpPr txBox="1"/>
           <p:nvPr/>
         </p:nvSpPr>
@@ -6331,7 +6331,7 @@
                   <a:schemeClr val="tx2"/>
                 </a:solidFill>
               </a:rPr>
-              <a:t>Domain controller telemetry collected continuously</a:t>
+              <a:t>Analytics rules enabled in Sentinel</a:t>
             </a:r>
             <a:endParaRPr lang="en-US" sz="1400" dirty="0"/>
           </a:p>
@@ -6348,7 +6348,7 @@
                   <a:schemeClr val="accent6"/>
                 </a:solidFill>
               </a:rPr>
-              <a:t>Domain controller security events arriving in the workspace.</a:t>
+              <a:t>Enabled analytics rules across all workspaces.</a:t>
             </a:r>
             <a:endParaRPr lang="en-US" sz="1400" dirty="0"/>
           </a:p>
@@ -6423,7 +6423,7 @@
       </p:sp>
       <p:sp>
         <p:nvSpPr>
-          <p:cNvPr id="15" name="F4 Alerts closed with a documented disposition"/>
+          <p:cNvPr id="15" name="F4 Threat intelligence indicators ingested tenant-wide"/>
           <p:cNvSpPr txBox="1"/>
           <p:nvPr/>
         </p:nvSpPr>
@@ -6451,7 +6451,7 @@
                   <a:schemeClr val="tx2"/>
                 </a:solidFill>
               </a:rPr>
-              <a:t>Alerts closed with a documented disposition</a:t>
+              <a:t>Threat intelligence indicators ingested tenant-wide</a:t>
             </a:r>
             <a:endParaRPr lang="en-US" sz="1400" dirty="0"/>
           </a:p>
@@ -6468,7 +6468,7 @@
                   <a:schemeClr val="accent6"/>
                 </a:solidFill>
               </a:rPr>
-              <a:t>Alerts closed in the last 30 days that carry a classification and a closing comment.</a:t>
+              <a:t>Threat intelligence indicators available for matching in the workspace.</a:t>
             </a:r>
             <a:endParaRPr lang="en-US" sz="1400" dirty="0"/>
           </a:p>
@@ -6543,7 +6543,7 @@
       </p:sp>
       <p:sp>
         <p:nvSpPr>
-          <p:cNvPr id="18" name="F5 Defender for Identity sensors healthy on domain controllers"/>
+          <p:cNvPr id="18" name="F5 Alerts closed with a documented disposition"/>
           <p:cNvSpPr txBox="1"/>
           <p:nvPr/>
         </p:nvSpPr>
@@ -6571,7 +6571,7 @@
                   <a:schemeClr val="tx2"/>
                 </a:solidFill>
               </a:rPr>
-              <a:t>Defender for Identity sensors healthy on domain controllers</a:t>
+              <a:t>Alerts closed with a documented disposition</a:t>
             </a:r>
             <a:endParaRPr lang="en-US" sz="1400" dirty="0"/>
           </a:p>
@@ -6588,7 +6588,7 @@
                   <a:schemeClr val="accent6"/>
                 </a:solidFill>
               </a:rPr>
-              <a:t>Sensors reporting healthy, of sensors registered.</a:t>
+              <a:t>Alerts closed in the last 30 days that carry a classification and a closing comment.</a:t>
             </a:r>
             <a:endParaRPr lang="en-US" sz="1400" dirty="0"/>
           </a:p>
@@ -6824,11 +6824,11 @@
         <p:spPr>
           <a:xfrm>
             <a:off x="548640" y="1600200"/>
-            <a:ext cx="3515258" cy="1677924"/>
+            <a:ext cx="3515258" cy="1495044"/>
           </a:xfrm>
           <a:prstGeom prst="roundRect">
             <a:avLst>
-              <a:gd name="adj" fmla="val 4360"/>
+              <a:gd name="adj" fmla="val 4893"/>
             </a:avLst>
           </a:prstGeom>
           <a:solidFill>
@@ -6884,14 +6884,14 @@
       </p:sp>
       <p:sp>
         <p:nvSpPr>
-          <p:cNvPr id="6" name="D1 Analytics rules enabled in Sentinel"/>
+          <p:cNvPr id="6" name="D1 Domain controller telemetry collected continuously"/>
           <p:cNvSpPr txBox="1"/>
           <p:nvPr/>
         </p:nvSpPr>
         <p:spPr>
           <a:xfrm>
             <a:off x="1371600" y="1783080"/>
-            <a:ext cx="2527706" cy="1385316"/>
+            <a:ext cx="2527706" cy="1202436"/>
           </a:xfrm>
           <a:prstGeom prst="rect">
             <a:avLst/>
@@ -6912,7 +6912,7 @@
                   <a:schemeClr val="tx2"/>
                 </a:solidFill>
               </a:rPr>
-              <a:t>Analytics rules enabled in Sentinel</a:t>
+              <a:t>Domain controller telemetry collected continuously</a:t>
             </a:r>
             <a:endParaRPr lang="en-US" sz="1400" dirty="0"/>
           </a:p>
@@ -6929,7 +6929,7 @@
                   <a:schemeClr val="accent6"/>
                 </a:solidFill>
               </a:rPr>
-              <a:t>Enabled analytics rules across all workspaces.</a:t>
+              <a:t>Domain controller security events arriving in the workspace.</a:t>
             </a:r>
             <a:endParaRPr lang="en-US" sz="1400" dirty="0"/>
           </a:p>
@@ -6944,11 +6944,11 @@
         <p:spPr>
           <a:xfrm>
             <a:off x="4338218" y="1600200"/>
-            <a:ext cx="3515258" cy="1677924"/>
+            <a:ext cx="3515258" cy="1495044"/>
           </a:xfrm>
           <a:prstGeom prst="roundRect">
             <a:avLst>
-              <a:gd name="adj" fmla="val 4360"/>
+              <a:gd name="adj" fmla="val 4893"/>
             </a:avLst>
           </a:prstGeom>
           <a:solidFill>
@@ -7004,14 +7004,14 @@
       </p:sp>
       <p:sp>
         <p:nvSpPr>
-          <p:cNvPr id="9" name="D2 Threat intelligence indicators ingested tenant-wide"/>
+          <p:cNvPr id="9" name="D2 Defender for Identity sensors healthy on domain controllers"/>
           <p:cNvSpPr txBox="1"/>
           <p:nvPr/>
         </p:nvSpPr>
         <p:spPr>
           <a:xfrm>
             <a:off x="5161178" y="1783080"/>
-            <a:ext cx="2527706" cy="1385316"/>
+            <a:ext cx="2527706" cy="1202436"/>
           </a:xfrm>
           <a:prstGeom prst="rect">
             <a:avLst/>
@@ -7032,7 +7032,7 @@
                   <a:schemeClr val="tx2"/>
                 </a:solidFill>
               </a:rPr>
-              <a:t>Threat intelligence indicators ingested tenant-wide</a:t>
+              <a:t>Defender for Identity sensors healthy on domain controllers</a:t>
             </a:r>
             <a:endParaRPr lang="en-US" sz="1400" dirty="0"/>
           </a:p>
@@ -7049,7 +7049,7 @@
                   <a:schemeClr val="accent6"/>
                 </a:solidFill>
               </a:rPr>
-              <a:t>Threat intelligence indicators available for matching in the workspace.</a:t>
+              <a:t>Sensors reporting healthy, of sensors registered.</a:t>
             </a:r>
             <a:endParaRPr lang="en-US" sz="1400" dirty="0"/>
           </a:p>
@@ -7064,11 +7064,11 @@
         <p:spPr>
           <a:xfrm>
             <a:off x="8127797" y="1600200"/>
-            <a:ext cx="3515258" cy="1677924"/>
+            <a:ext cx="3515258" cy="1495044"/>
           </a:xfrm>
           <a:prstGeom prst="roundRect">
             <a:avLst>
-              <a:gd name="adj" fmla="val 4360"/>
+              <a:gd name="adj" fmla="val 4893"/>
             </a:avLst>
           </a:prstGeom>
           <a:solidFill>
@@ -7131,7 +7131,7 @@
         <p:spPr>
           <a:xfrm>
             <a:off x="8950757" y="1783080"/>
-            <a:ext cx="2527706" cy="1385316"/>
+            <a:ext cx="2527706" cy="1202436"/>
           </a:xfrm>
           <a:prstGeom prst="rect">
             <a:avLst/>

--- a/docs/The Controls That Matter.pptx
+++ b/docs/The Controls That Matter.pptx
@@ -121,7 +121,7 @@
   <p:extLst>
     <p:ext uri="{521415D9-36F7-43E2-AB2F-B90AF26B5E84}">
       <p14:sectionLst xmlns:p14="http://schemas.microsoft.com/office/powerpoint/2010/main">
-        <p14:section name="Overview" id="{d9f0ad6d-f075-ff64-e781-d49d342b543e}">
+        <p14:section name="Overview" id="{18faf753-0458-c8d1-6c50-b58d0617b7ae}">
           <p14:sldIdLst>
             <p14:sldId id="256"/>
             <p14:sldId id="257"/>
@@ -129,37 +129,37 @@
             <p14:sldId id="259"/>
           </p14:sldIdLst>
         </p14:section>
-        <p14:section name="Identity and access" id="{011da6e0-c1c1-a106-03b2-40566a47a735}">
+        <p14:section name="Identity and access" id="{091d7165-baea-b30c-f64d-57b25e00ed7e}">
           <p14:sldIdLst>
             <p14:sldId id="260"/>
             <p14:sldId id="261"/>
           </p14:sldIdLst>
         </p14:section>
-        <p14:section name="Endpoint and workload" id="{4a029186-0a55-aed6-74df-f47d14242e4a}">
+        <p14:section name="Endpoint and workload" id="{e52e23fc-abf6-5549-588a-7eba83b619bb}">
           <p14:sldIdLst>
             <p14:sldId id="262"/>
             <p14:sldId id="263"/>
           </p14:sldIdLst>
         </p14:section>
-        <p14:section name="Network and boundary" id="{186d929f-8c49-5a25-c8aa-bad834a6cd31}">
+        <p14:section name="Network and boundary" id="{d64a4dce-c561-9b60-402a-13cab30c4d77}">
           <p14:sldIdLst>
             <p14:sldId id="264"/>
             <p14:sldId id="265"/>
           </p14:sldIdLst>
         </p14:section>
-        <p14:section name="Data protection" id="{cc1a25bf-b2d0-dd11-beba-d24ae51b6d4a}">
+        <p14:section name="Data protection" id="{a4219d7c-cb6e-a31e-f193-41dd971c57a9}">
           <p14:sldIdLst>
             <p14:sldId id="266"/>
             <p14:sldId id="267"/>
           </p14:sldIdLst>
         </p14:section>
-        <p14:section name="Detection and response" id="{f04bdd99-17f9-da7e-d99d-105a81d68e19}">
+        <p14:section name="Detection and response" id="{cdcd07e4-3b3d-594c-4156-5a36456213d7}">
           <p14:sldIdLst>
             <p14:sldId id="268"/>
             <p14:sldId id="269"/>
           </p14:sldIdLst>
         </p14:section>
-        <p14:section name="Feedback" id="{920fdea2-7ba2-f8e0-f4d5-7f0a94820d08}">
+        <p14:section name="Feedback" id="{2743ca00-a922-8971-9699-bb3feba909e2}">
           <p14:sldIdLst>
             <p14:sldId id="270"/>
           </p14:sldIdLst>
@@ -1277,7 +1277,7 @@
           <a:p>
             <a:r>
               <a:rPr lang="en-US" dirty="0"/>
-              <a:t>Detection and response, foundational controls. These are configured when the environment is built and are expected at E at every review. Endpoint sensors active on onboarded Azure virtual machines: Active sensors among the Azure virtual machines onboarded to Defender for Endpoint, seen in the last 7 days. Workstations and network devices such as firewalls are not part of this measure. Cloud workload protection across the resource estate: Eligible resources on a Standard Defender for Cloud plan, read from the subscription plan configuration. Analytics rules enabled in Sentinel: Enabled analytics rules across all workspaces. Threat intelligence indicators ingested tenant-wide: Threat intelligence indicators available for matching in the workspace. Alerts closed with a documented disposition: Alerts closed in the last 30 days that carry a classification and a closing comment. Audit logging initiative compliant across its resources: Resources compliant with the ATMO-MXDR diagnostic logging initiative.</a:t>
+              <a:t>Detection and response, foundational controls. These are configured when the environment is built and are expected at E at every review. Endpoint sensors active on onboarded Azure virtual machines: Active sensors among the Azure virtual machines onboarded to Defender for Endpoint, seen in the last 7 days. Workstations and network devices such as firewalls are not part of this measure. Cloud workload protection across the resource estate: Eligible resources on a Standard Defender for Cloud plan, read from the subscription plan configuration. Analytics rules enabled in every Sentinel workspace: Sentinel workspaces with at least one enabled analytics rule, of the workspaces in scope. It does not identify which rules are Atmosera's standard set. Threat intelligence indicators ingested tenant-wide: Threat intelligence indicators available for matching in the workspace. Alerts closed with a documented disposition: Alerts closed in the last 30 days that carry a classification and a closing comment. Audit logging initiative compliant across its resources: Resources compliant with the ATMO-MXDR diagnostic logging initiative.</a:t>
             </a:r>
             <a:endParaRPr lang="en-US" dirty="0"/>
           </a:p>
@@ -6303,7 +6303,7 @@
       </p:sp>
       <p:sp>
         <p:nvSpPr>
-          <p:cNvPr id="12" name="F3 Analytics rules enabled in Sentinel"/>
+          <p:cNvPr id="12" name="F3 Analytics rules enabled in every Sentinel workspace"/>
           <p:cNvSpPr txBox="1"/>
           <p:nvPr/>
         </p:nvSpPr>
@@ -6331,7 +6331,7 @@
                   <a:schemeClr val="tx2"/>
                 </a:solidFill>
               </a:rPr>
-              <a:t>Analytics rules enabled in Sentinel</a:t>
+              <a:t>Analytics rules enabled in every Sentinel workspace</a:t>
             </a:r>
             <a:endParaRPr lang="en-US" sz="1400" dirty="0"/>
           </a:p>
@@ -6348,7 +6348,7 @@
                   <a:schemeClr val="accent6"/>
                 </a:solidFill>
               </a:rPr>
-              <a:t>Enabled analytics rules across all workspaces.</a:t>
+              <a:t>Sentinel workspaces with at least one enabled analytics rule, of the workspaces in scope. It does not identify which rules are Atmosera's standard set.</a:t>
             </a:r>
             <a:endParaRPr lang="en-US" sz="1400" dirty="0"/>
           </a:p>

--- a/docs/The Controls That Matter.pptx
+++ b/docs/The Controls That Matter.pptx
@@ -121,7 +121,7 @@
   <p:extLst>
     <p:ext uri="{521415D9-36F7-43E2-AB2F-B90AF26B5E84}">
       <p14:sectionLst xmlns:p14="http://schemas.microsoft.com/office/powerpoint/2010/main">
-        <p14:section name="Overview" id="{18faf753-0458-c8d1-6c50-b58d0617b7ae}">
+        <p14:section name="Overview" id="{31478f99-389b-eb79-72af-7347030f6c2e}">
           <p14:sldIdLst>
             <p14:sldId id="256"/>
             <p14:sldId id="257"/>
@@ -129,37 +129,37 @@
             <p14:sldId id="259"/>
           </p14:sldIdLst>
         </p14:section>
-        <p14:section name="Identity and access" id="{091d7165-baea-b30c-f64d-57b25e00ed7e}">
+        <p14:section name="Identity and access" id="{359860de-30f9-99a3-eb67-4a2585a45746}">
           <p14:sldIdLst>
             <p14:sldId id="260"/>
             <p14:sldId id="261"/>
           </p14:sldIdLst>
         </p14:section>
-        <p14:section name="Endpoint and workload" id="{e52e23fc-abf6-5549-588a-7eba83b619bb}">
+        <p14:section name="Endpoint and workload" id="{bc59fcf3-2dcd-42b3-afdc-24ab344257a2}">
           <p14:sldIdLst>
             <p14:sldId id="262"/>
             <p14:sldId id="263"/>
           </p14:sldIdLst>
         </p14:section>
-        <p14:section name="Network and boundary" id="{d64a4dce-c561-9b60-402a-13cab30c4d77}">
+        <p14:section name="Network and boundary" id="{7db857fc-a341-eb07-2b28-d7e8edadbabc}">
           <p14:sldIdLst>
             <p14:sldId id="264"/>
             <p14:sldId id="265"/>
           </p14:sldIdLst>
         </p14:section>
-        <p14:section name="Data protection" id="{a4219d7c-cb6e-a31e-f193-41dd971c57a9}">
+        <p14:section name="Data protection" id="{8d75dd8e-404f-1b5d-bfc3-17b1ee3bceff}">
           <p14:sldIdLst>
             <p14:sldId id="266"/>
             <p14:sldId id="267"/>
           </p14:sldIdLst>
         </p14:section>
-        <p14:section name="Detection and response" id="{cdcd07e4-3b3d-594c-4156-5a36456213d7}">
+        <p14:section name="Detection and response" id="{0a3fcf14-c01c-13b1-c1e5-a53c60077814}">
           <p14:sldIdLst>
             <p14:sldId id="268"/>
             <p14:sldId id="269"/>
           </p14:sldIdLst>
         </p14:section>
-        <p14:section name="Feedback" id="{2743ca00-a922-8971-9699-bb3feba909e2}">
+        <p14:section name="Feedback" id="{1e5eb518-a4bd-02c0-ee3e-57e242cd3c0d}">
           <p14:sldIdLst>
             <p14:sldId id="270"/>
           </p14:sldIdLst>
@@ -1013,7 +1013,7 @@
           <a:p>
             <a:r>
               <a:rPr lang="en-US" dirty="0"/>
-              <a:t>Network and boundary, defense in depth controls. Each of these waits on something the client approves, schedules or licenses, and is sequenced on the roadmap. Workload subnets protected by segmentation: Workload subnets with a network security group or a route through the firewall. Storage accounts closed to public networks: Storage accounts with public network access disabled. Blob containers closed to anonymous access: Blob containers set to private at the container level, read in every storage account, so they stay closed even if the account-level setting is relaxed. Directory traffic signed and channel-bound: Domain controllers in Azure requiring LDAP server signing and channel binding. NTLMv2 enforced with LM and NTLM refused: Onboarded Windows virtual machines in Azure sending NTLMv2 responses only.</a:t>
+              <a:t>Network and boundary, defense in depth controls. Each of these waits on something the client approves, schedules or licenses, and is sequenced on the roadmap. Workload subnets with a network security group or firewall route: Workload subnets with a network security group or a route through the firewall configured. The rules and the traffic they permit are not evaluated. Storage accounts closed to public networks: Storage accounts with public network access disabled. Blob containers closed to anonymous access: Blob containers set to private at the container level, read in every storage account, so they stay closed even if the account-level setting is relaxed. Directory traffic signed and channel-bound: Domain controllers in Azure requiring LDAP server signing and channel binding. NTLMv2 enforced with LM and NTLM refused: Onboarded Windows virtual machines in Azure sending NTLMv2 responses only.</a:t>
             </a:r>
             <a:endParaRPr lang="en-US" dirty="0"/>
           </a:p>
@@ -1101,7 +1101,7 @@
           <a:p>
             <a:r>
               <a:rPr lang="en-US" dirty="0"/>
-              <a:t>Data protection, foundational controls. These are configured when the environment is built and are expected at E at every review. Secure transfer required on storage accounts: Storage accounts configured to require secure transfer. Storage minimum TLS 1.2: Storage accounts requiring TLS 1.2 or newer. Key Vault soft delete: Vaults able to recover deleted secrets, keys and certificates. Key Vault purge protection: Vaults protected against permanent deletion during the retention period. Managed disks encrypted at rest: Managed disks encrypted with platform or customer managed keys. Safe Links scanning on mail, Teams and Office: At least one Safe Links policy covers mail, Teams and Office. Safe Attachments blocking malicious files: At least one enabled Safe Attachments policy blocks or replaces malicious attachments. Malicious mail removed after delivery: Post-delivery removals of malicious mail in the last 30 days. Zero-hour auto purge enabled for malware, spam and phishing: Every malware and content filter policy keeps zero-hour auto purge on.</a:t>
+              <a:t>Data protection, foundational controls. These are configured when the environment is built and are expected at E at every review. Secure transfer required on storage accounts: Storage accounts configured to require secure transfer. Storage minimum TLS 1.2: Storage accounts requiring TLS 1.2 or newer. Key Vault soft delete: Vaults able to recover deleted secrets, keys and certificates. Key Vault purge protection: Vaults protected against permanent deletion during the retention period. Managed disks encrypted at rest: Managed disks encrypted with platform or customer managed keys. Platform-managed encryption is on by default in Azure, so this reads the default. Encryption at host is graded separately. Safe Links policy configured for mail, Teams and Office: At least one Safe Links policy has Safe Links on for mail, Teams and Office. The recipients it applies to, its exceptions and its rule state are not read. Safe Attachments policy set to block or replace malicious files: At least one enabled Safe Attachments policy is set to block or replace malicious attachments. The recipients it applies to and its exceptions are not read. Malicious mail removed after delivery: Post-delivery removals of malicious mail in the last 30 days. Zero-hour auto purge enabled for malware, spam and phishing: Every malware and content filter policy keeps zero-hour auto purge on.</a:t>
             </a:r>
             <a:endParaRPr lang="en-US" dirty="0"/>
           </a:p>
@@ -1277,7 +1277,7 @@
           <a:p>
             <a:r>
               <a:rPr lang="en-US" dirty="0"/>
-              <a:t>Detection and response, foundational controls. These are configured when the environment is built and are expected at E at every review. Endpoint sensors active on onboarded Azure virtual machines: Active sensors among the Azure virtual machines onboarded to Defender for Endpoint, seen in the last 7 days. Workstations and network devices such as firewalls are not part of this measure. Cloud workload protection across the resource estate: Eligible resources on a Standard Defender for Cloud plan, read from the subscription plan configuration. Analytics rules enabled in every Sentinel workspace: Sentinel workspaces with at least one enabled analytics rule, of the workspaces in scope. It does not identify which rules are Atmosera's standard set. Threat intelligence indicators ingested tenant-wide: Threat intelligence indicators available for matching in the workspace. Alerts closed with a documented disposition: Alerts closed in the last 30 days that carry a classification and a closing comment. Audit logging initiative compliant across its resources: Resources compliant with the ATMO-MXDR diagnostic logging initiative.</a:t>
+              <a:t>Detection and response, foundational controls. These are configured when the environment is built and are expected at E at every review. Endpoint sensors active on onboarded Azure virtual machines: Active sensors among the Azure virtual machines onboarded to Defender for Endpoint, seen in the last 7 days. Workstations and network devices such as firewalls are not part of this measure. Cloud workload protection plan coverage, a plan-level estimate: Eligible resources on a Standard Defender for Cloud plan, a plan-level estimate read from the subscription plan configuration. Analytics rules enabled in every Sentinel workspace: Sentinel workspaces with at least one enabled analytics rule, of the workspaces in scope. It does not identify which rules are Atmosera's standard set. Threat intelligence indicators ingested tenant-wide: Threat intelligence indicators available for matching in the workspace. Alerts closed with a documented disposition: Alerts closed in the last 30 days that carry a classification and a closing comment. Audit logging initiative compliant across its resources: Resources compliant with the ATMO-MXDR diagnostic logging initiative.</a:t>
             </a:r>
             <a:endParaRPr lang="en-US" dirty="0"/>
           </a:p>
@@ -3540,11 +3540,11 @@
         <p:spPr>
           <a:xfrm>
             <a:off x="548640" y="1600200"/>
-            <a:ext cx="3515258" cy="1819656"/>
+            <a:ext cx="3515258" cy="2043684"/>
           </a:xfrm>
           <a:prstGeom prst="roundRect">
             <a:avLst>
-              <a:gd name="adj" fmla="val 4020"/>
+              <a:gd name="adj" fmla="val 3579"/>
             </a:avLst>
           </a:prstGeom>
           <a:solidFill>
@@ -3600,14 +3600,14 @@
       </p:sp>
       <p:sp>
         <p:nvSpPr>
-          <p:cNvPr id="6" name="D1 Workload subnets protected by segmentation"/>
+          <p:cNvPr id="6" name="D1 Workload subnets with a network security group or firewall route"/>
           <p:cNvSpPr txBox="1"/>
           <p:nvPr/>
         </p:nvSpPr>
         <p:spPr>
           <a:xfrm>
             <a:off x="1371600" y="1783080"/>
-            <a:ext cx="2527706" cy="1527048"/>
+            <a:ext cx="2527706" cy="1751076"/>
           </a:xfrm>
           <a:prstGeom prst="rect">
             <a:avLst/>
@@ -3628,7 +3628,7 @@
                   <a:schemeClr val="tx2"/>
                 </a:solidFill>
               </a:rPr>
-              <a:t>Workload subnets protected by segmentation</a:t>
+              <a:t>Workload subnets with a network security group or firewall route</a:t>
             </a:r>
             <a:endParaRPr lang="en-US" sz="1400" dirty="0"/>
           </a:p>
@@ -3645,7 +3645,7 @@
                   <a:schemeClr val="accent6"/>
                 </a:solidFill>
               </a:rPr>
-              <a:t>Workload subnets with a network security group or a route through the firewall.</a:t>
+              <a:t>Workload subnets with a network security group or a route through the firewall configured. The rules and the traffic they permit are not evaluated.</a:t>
             </a:r>
             <a:endParaRPr lang="en-US" sz="1400" dirty="0"/>
           </a:p>
@@ -3660,11 +3660,11 @@
         <p:spPr>
           <a:xfrm>
             <a:off x="4338218" y="1600200"/>
-            <a:ext cx="3515258" cy="1819656"/>
+            <a:ext cx="3515258" cy="2043684"/>
           </a:xfrm>
           <a:prstGeom prst="roundRect">
             <a:avLst>
-              <a:gd name="adj" fmla="val 4020"/>
+              <a:gd name="adj" fmla="val 3579"/>
             </a:avLst>
           </a:prstGeom>
           <a:solidFill>
@@ -3727,7 +3727,7 @@
         <p:spPr>
           <a:xfrm>
             <a:off x="5161178" y="1783080"/>
-            <a:ext cx="2527706" cy="1527048"/>
+            <a:ext cx="2527706" cy="1751076"/>
           </a:xfrm>
           <a:prstGeom prst="rect">
             <a:avLst/>
@@ -3780,11 +3780,11 @@
         <p:spPr>
           <a:xfrm>
             <a:off x="8127797" y="1600200"/>
-            <a:ext cx="3515258" cy="1819656"/>
+            <a:ext cx="3515258" cy="2043684"/>
           </a:xfrm>
           <a:prstGeom prst="roundRect">
             <a:avLst>
-              <a:gd name="adj" fmla="val 4020"/>
+              <a:gd name="adj" fmla="val 3579"/>
             </a:avLst>
           </a:prstGeom>
           <a:solidFill>
@@ -3847,7 +3847,7 @@
         <p:spPr>
           <a:xfrm>
             <a:off x="8950757" y="1783080"/>
-            <a:ext cx="2527706" cy="1527048"/>
+            <a:ext cx="2527706" cy="1751076"/>
           </a:xfrm>
           <a:prstGeom prst="rect">
             <a:avLst/>
@@ -3899,12 +3899,12 @@
         </p:nvSpPr>
         <p:spPr>
           <a:xfrm>
-            <a:off x="548640" y="3694176"/>
-            <a:ext cx="3515258" cy="1819656"/>
+            <a:off x="548640" y="3918204"/>
+            <a:ext cx="3515258" cy="2043684"/>
           </a:xfrm>
           <a:prstGeom prst="roundRect">
             <a:avLst>
-              <a:gd name="adj" fmla="val 4020"/>
+              <a:gd name="adj" fmla="val 3579"/>
             </a:avLst>
           </a:prstGeom>
           <a:solidFill>
@@ -3926,7 +3926,7 @@
         </p:nvSpPr>
         <p:spPr>
           <a:xfrm>
-            <a:off x="731520" y="3895344"/>
+            <a:off x="731520" y="4119372"/>
             <a:ext cx="502920" cy="329184"/>
           </a:xfrm>
           <a:prstGeom prst="roundRect">
@@ -3966,8 +3966,8 @@
         </p:nvSpPr>
         <p:spPr>
           <a:xfrm>
-            <a:off x="1371600" y="3877056"/>
-            <a:ext cx="2527706" cy="1527048"/>
+            <a:off x="1371600" y="4101084"/>
+            <a:ext cx="2527706" cy="1751076"/>
           </a:xfrm>
           <a:prstGeom prst="rect">
             <a:avLst/>
@@ -4019,12 +4019,12 @@
         </p:nvSpPr>
         <p:spPr>
           <a:xfrm>
-            <a:off x="4338218" y="3694176"/>
-            <a:ext cx="3515258" cy="1819656"/>
+            <a:off x="4338218" y="3918204"/>
+            <a:ext cx="3515258" cy="2043684"/>
           </a:xfrm>
           <a:prstGeom prst="roundRect">
             <a:avLst>
-              <a:gd name="adj" fmla="val 4020"/>
+              <a:gd name="adj" fmla="val 3579"/>
             </a:avLst>
           </a:prstGeom>
           <a:solidFill>
@@ -4046,7 +4046,7 @@
         </p:nvSpPr>
         <p:spPr>
           <a:xfrm>
-            <a:off x="4521098" y="3895344"/>
+            <a:off x="4521098" y="4119372"/>
             <a:ext cx="502920" cy="329184"/>
           </a:xfrm>
           <a:prstGeom prst="roundRect">
@@ -4086,8 +4086,8 @@
         </p:nvSpPr>
         <p:spPr>
           <a:xfrm>
-            <a:off x="5161178" y="3877056"/>
-            <a:ext cx="2527706" cy="1527048"/>
+            <a:off x="5161178" y="4101084"/>
+            <a:ext cx="2527706" cy="1751076"/>
           </a:xfrm>
           <a:prstGeom prst="rect">
             <a:avLst/>
@@ -4826,7 +4826,7 @@
                   <a:schemeClr val="accent6"/>
                 </a:solidFill>
               </a:rPr>
-              <a:t>Managed disks encrypted with platform or customer managed keys.</a:t>
+              <a:t>Managed disks encrypted with platform or customer managed keys. Platform-managed encryption is on by default in Azure, so this reads the default. Encryption at host is graded separately.</a:t>
             </a:r>
             <a:endParaRPr lang="en-US" sz="1400" dirty="0"/>
           </a:p>
@@ -4901,7 +4901,7 @@
       </p:sp>
       <p:sp>
         <p:nvSpPr>
-          <p:cNvPr id="21" name="F6 Safe Links scanning on mail, Teams and Office"/>
+          <p:cNvPr id="21" name="F6 Safe Links policy configured for mail, Teams and Office"/>
           <p:cNvSpPr txBox="1"/>
           <p:nvPr/>
         </p:nvSpPr>
@@ -4929,7 +4929,7 @@
                   <a:schemeClr val="tx2"/>
                 </a:solidFill>
               </a:rPr>
-              <a:t>Safe Links scanning on mail, Teams and Office</a:t>
+              <a:t>Safe Links policy configured for mail, Teams and Office</a:t>
             </a:r>
             <a:endParaRPr lang="en-US" sz="1400" dirty="0"/>
           </a:p>
@@ -4946,7 +4946,7 @@
                   <a:schemeClr val="accent6"/>
                 </a:solidFill>
               </a:rPr>
-              <a:t>At least one Safe Links policy covers mail, Teams and Office.</a:t>
+              <a:t>At least one Safe Links policy has Safe Links on for mail, Teams and Office. The recipients it applies to, its exceptions and its rule state are not read.</a:t>
             </a:r>
             <a:endParaRPr lang="en-US" sz="1400" dirty="0"/>
           </a:p>
@@ -5021,7 +5021,7 @@
       </p:sp>
       <p:sp>
         <p:nvSpPr>
-          <p:cNvPr id="24" name="F7 Safe Attachments blocking malicious files"/>
+          <p:cNvPr id="24" name="F7 Safe Attachments policy set to block or replace malicious files"/>
           <p:cNvSpPr txBox="1"/>
           <p:nvPr/>
         </p:nvSpPr>
@@ -5049,7 +5049,7 @@
                   <a:schemeClr val="tx2"/>
                 </a:solidFill>
               </a:rPr>
-              <a:t>Safe Attachments blocking malicious files</a:t>
+              <a:t>Safe Attachments policy set to block or replace malicious files</a:t>
             </a:r>
             <a:endParaRPr lang="en-US" sz="1400" dirty="0"/>
           </a:p>
@@ -5066,7 +5066,7 @@
                   <a:schemeClr val="accent6"/>
                 </a:solidFill>
               </a:rPr>
-              <a:t>At least one enabled Safe Attachments policy blocks or replaces malicious attachments.</a:t>
+              <a:t>At least one enabled Safe Attachments policy is set to block or replace malicious attachments. The recipients it applies to and its exceptions are not read.</a:t>
             </a:r>
             <a:endParaRPr lang="en-US" sz="1400" dirty="0"/>
           </a:p>
@@ -6183,7 +6183,7 @@
       </p:sp>
       <p:sp>
         <p:nvSpPr>
-          <p:cNvPr id="9" name="F2 Cloud workload protection across the resource estate"/>
+          <p:cNvPr id="9" name="F2 Cloud workload protection plan coverage, a plan-level estimate"/>
           <p:cNvSpPr txBox="1"/>
           <p:nvPr/>
         </p:nvSpPr>
@@ -6211,7 +6211,7 @@
                   <a:schemeClr val="tx2"/>
                 </a:solidFill>
               </a:rPr>
-              <a:t>Cloud workload protection across the resource estate</a:t>
+              <a:t>Cloud workload protection plan coverage, a plan-level estimate</a:t>
             </a:r>
             <a:endParaRPr lang="en-US" sz="1400" dirty="0"/>
           </a:p>
@@ -6228,7 +6228,7 @@
                   <a:schemeClr val="accent6"/>
                 </a:solidFill>
               </a:rPr>
-              <a:t>Eligible resources on a Standard Defender for Cloud plan, read from the subscription plan configuration.</a:t>
+              <a:t>Eligible resources on a Standard Defender for Cloud plan, a plan-level estimate read from the subscription plan configuration.</a:t>
             </a:r>
             <a:endParaRPr lang="en-US" sz="1400" dirty="0"/>
           </a:p>

--- a/docs/The Controls That Matter.pptx
+++ b/docs/The Controls That Matter.pptx
@@ -121,7 +121,7 @@
   <p:extLst>
     <p:ext uri="{521415D9-36F7-43E2-AB2F-B90AF26B5E84}">
       <p14:sectionLst xmlns:p14="http://schemas.microsoft.com/office/powerpoint/2010/main">
-        <p14:section name="Overview" id="{31478f99-389b-eb79-72af-7347030f6c2e}">
+        <p14:section name="Overview" id="{f6b6b2b6-acd0-56dd-a06b-c85865f17d88}">
           <p14:sldIdLst>
             <p14:sldId id="256"/>
             <p14:sldId id="257"/>
@@ -129,37 +129,37 @@
             <p14:sldId id="259"/>
           </p14:sldIdLst>
         </p14:section>
-        <p14:section name="Identity and access" id="{359860de-30f9-99a3-eb67-4a2585a45746}">
+        <p14:section name="Identity and access" id="{93c79d61-57ef-e15f-8e44-29a4e05a537f}">
           <p14:sldIdLst>
             <p14:sldId id="260"/>
             <p14:sldId id="261"/>
           </p14:sldIdLst>
         </p14:section>
-        <p14:section name="Endpoint and workload" id="{bc59fcf3-2dcd-42b3-afdc-24ab344257a2}">
+        <p14:section name="Endpoint and workload" id="{6c5be07a-13ac-76c2-8e7b-d6f5d436e7cc}">
           <p14:sldIdLst>
             <p14:sldId id="262"/>
             <p14:sldId id="263"/>
           </p14:sldIdLst>
         </p14:section>
-        <p14:section name="Network and boundary" id="{7db857fc-a341-eb07-2b28-d7e8edadbabc}">
+        <p14:section name="Network and boundary" id="{1dfa328d-b8b8-7115-e6c9-39381a56a772}">
           <p14:sldIdLst>
             <p14:sldId id="264"/>
             <p14:sldId id="265"/>
           </p14:sldIdLst>
         </p14:section>
-        <p14:section name="Data protection" id="{8d75dd8e-404f-1b5d-bfc3-17b1ee3bceff}">
+        <p14:section name="Data protection" id="{d11244b8-a45a-ecca-e027-ebb96017c4f6}">
           <p14:sldIdLst>
             <p14:sldId id="266"/>
             <p14:sldId id="267"/>
           </p14:sldIdLst>
         </p14:section>
-        <p14:section name="Detection and response" id="{0a3fcf14-c01c-13b1-c1e5-a53c60077814}">
+        <p14:section name="Detection and response" id="{b2d7f890-8dbd-7d85-ffd5-2fbcbfc8e0d0}">
           <p14:sldIdLst>
             <p14:sldId id="268"/>
             <p14:sldId id="269"/>
           </p14:sldIdLst>
         </p14:section>
-        <p14:section name="Feedback" id="{1e5eb518-a4bd-02c0-ee3e-57e242cd3c0d}">
+        <p14:section name="Feedback" id="{52972e77-1143-b1d3-47a5-487c258f6192}">
           <p14:sldIdLst>
             <p14:sldId id="270"/>
           </p14:sldIdLst>
@@ -1101,7 +1101,7 @@
           <a:p>
             <a:r>
               <a:rPr lang="en-US" dirty="0"/>
-              <a:t>Data protection, foundational controls. These are configured when the environment is built and are expected at E at every review. Secure transfer required on storage accounts: Storage accounts configured to require secure transfer. Storage minimum TLS 1.2: Storage accounts requiring TLS 1.2 or newer. Key Vault soft delete: Vaults able to recover deleted secrets, keys and certificates. Key Vault purge protection: Vaults protected against permanent deletion during the retention period. Managed disks encrypted at rest: Managed disks encrypted with platform or customer managed keys. Platform-managed encryption is on by default in Azure, so this reads the default. Encryption at host is graded separately. Safe Links policy configured for mail, Teams and Office: At least one Safe Links policy has Safe Links on for mail, Teams and Office. The recipients it applies to, its exceptions and its rule state are not read. Safe Attachments policy set to block or replace malicious files: At least one enabled Safe Attachments policy is set to block or replace malicious attachments. The recipients it applies to and its exceptions are not read. Malicious mail removed after delivery: Post-delivery removals of malicious mail in the last 30 days. Zero-hour auto purge enabled for malware, spam and phishing: Every malware and content filter policy keeps zero-hour auto purge on.</a:t>
+              <a:t>Data protection, foundational controls. These are configured when the environment is built and are expected at E at every review. Secure transfer required on storage accounts: Storage accounts configured to require secure transfer. Storage minimum TLS 1.2: Storage accounts requiring TLS 1.2 or newer. Key Vault soft delete: Vaults able to recover deleted secrets, keys and certificates. Key Vault purge protection: Vaults protected against permanent deletion during the retention period. Managed disks encrypted at rest: Platform keys, the Azure default, or customer managed keys. Encryption at host is graded separately. Safe Links policy set for mail, Teams and Office: One policy with all three on is enough. Recipients, exceptions and rule state are not read. Safe Attachments policy set to block or replace malicious files: One enabled policy is enough. Scope and exceptions are not read. Malicious mail removed after delivery: Post-delivery removals of malicious mail in the last 30 days. Zero-hour auto purge enabled for malware, spam and phishing: Every malware and content filter policy keeps zero-hour auto purge on.</a:t>
             </a:r>
             <a:endParaRPr lang="en-US" dirty="0"/>
           </a:p>
@@ -4826,7 +4826,7 @@
                   <a:schemeClr val="accent6"/>
                 </a:solidFill>
               </a:rPr>
-              <a:t>Managed disks encrypted with platform or customer managed keys. Platform-managed encryption is on by default in Azure, so this reads the default. Encryption at host is graded separately.</a:t>
+              <a:t>Platform keys, the Azure default, or customer managed keys. Encryption at host is graded separately.</a:t>
             </a:r>
             <a:endParaRPr lang="en-US" sz="1400" dirty="0"/>
           </a:p>
@@ -4901,7 +4901,7 @@
       </p:sp>
       <p:sp>
         <p:nvSpPr>
-          <p:cNvPr id="21" name="F6 Safe Links policy configured for mail, Teams and Office"/>
+          <p:cNvPr id="21" name="F6 Safe Links policy set for mail, Teams and Office"/>
           <p:cNvSpPr txBox="1"/>
           <p:nvPr/>
         </p:nvSpPr>
@@ -4929,7 +4929,7 @@
                   <a:schemeClr val="tx2"/>
                 </a:solidFill>
               </a:rPr>
-              <a:t>Safe Links policy configured for mail, Teams and Office</a:t>
+              <a:t>Safe Links policy set for mail, Teams and Office</a:t>
             </a:r>
             <a:endParaRPr lang="en-US" sz="1400" dirty="0"/>
           </a:p>
@@ -4946,7 +4946,7 @@
                   <a:schemeClr val="accent6"/>
                 </a:solidFill>
               </a:rPr>
-              <a:t>At least one Safe Links policy has Safe Links on for mail, Teams and Office. The recipients it applies to, its exceptions and its rule state are not read.</a:t>
+              <a:t>One policy with all three on is enough. Recipients, exceptions and rule state are not read.</a:t>
             </a:r>
             <a:endParaRPr lang="en-US" sz="1400" dirty="0"/>
           </a:p>
@@ -5066,7 +5066,7 @@
                   <a:schemeClr val="accent6"/>
                 </a:solidFill>
               </a:rPr>
-              <a:t>At least one enabled Safe Attachments policy is set to block or replace malicious attachments. The recipients it applies to and its exceptions are not read.</a:t>
+              <a:t>One enabled policy is enough. Scope and exceptions are not read.</a:t>
             </a:r>
             <a:endParaRPr lang="en-US" sz="1400" dirty="0"/>
           </a:p>

--- a/docs/The Controls That Matter.pptx
+++ b/docs/The Controls That Matter.pptx
@@ -121,7 +121,7 @@
   <p:extLst>
     <p:ext uri="{521415D9-36F7-43E2-AB2F-B90AF26B5E84}">
       <p14:sectionLst xmlns:p14="http://schemas.microsoft.com/office/powerpoint/2010/main">
-        <p14:section name="Overview" id="{f6b6b2b6-acd0-56dd-a06b-c85865f17d88}">
+        <p14:section name="Overview" id="{287254b8-9147-04bb-0464-98982e9e9b7b}">
           <p14:sldIdLst>
             <p14:sldId id="256"/>
             <p14:sldId id="257"/>
@@ -129,37 +129,37 @@
             <p14:sldId id="259"/>
           </p14:sldIdLst>
         </p14:section>
-        <p14:section name="Identity and access" id="{93c79d61-57ef-e15f-8e44-29a4e05a537f}">
+        <p14:section name="Identity and access" id="{17122bc1-c6e4-1f8f-f1fa-4aee8567ec30}">
           <p14:sldIdLst>
             <p14:sldId id="260"/>
             <p14:sldId id="261"/>
           </p14:sldIdLst>
         </p14:section>
-        <p14:section name="Endpoint and workload" id="{6c5be07a-13ac-76c2-8e7b-d6f5d436e7cc}">
+        <p14:section name="Endpoint and workload" id="{4e69d21d-f4ae-51a1-0890-e6d3371e9c65}">
           <p14:sldIdLst>
             <p14:sldId id="262"/>
             <p14:sldId id="263"/>
           </p14:sldIdLst>
         </p14:section>
-        <p14:section name="Network and boundary" id="{1dfa328d-b8b8-7115-e6c9-39381a56a772}">
+        <p14:section name="Network and boundary" id="{5d673e84-21ef-54ed-8cf8-d98095fa6c5a}">
           <p14:sldIdLst>
             <p14:sldId id="264"/>
             <p14:sldId id="265"/>
           </p14:sldIdLst>
         </p14:section>
-        <p14:section name="Data protection" id="{d11244b8-a45a-ecca-e027-ebb96017c4f6}">
+        <p14:section name="Data protection" id="{4ea8832e-839d-658c-869c-7a7542426cc8}">
           <p14:sldIdLst>
             <p14:sldId id="266"/>
             <p14:sldId id="267"/>
           </p14:sldIdLst>
         </p14:section>
-        <p14:section name="Detection and response" id="{b2d7f890-8dbd-7d85-ffd5-2fbcbfc8e0d0}">
+        <p14:section name="Detection and response" id="{3972d8b1-72d0-5081-2f85-2ea678bc0419}">
           <p14:sldIdLst>
             <p14:sldId id="268"/>
             <p14:sldId id="269"/>
           </p14:sldIdLst>
         </p14:section>
-        <p14:section name="Feedback" id="{52972e77-1143-b1d3-47a5-487c258f6192}">
+        <p14:section name="Feedback" id="{f338314b-1177-d08f-2523-befb31eea2ab}">
           <p14:sldIdLst>
             <p14:sldId id="270"/>
           </p14:sldIdLst>
@@ -1101,7 +1101,7 @@
           <a:p>
             <a:r>
               <a:rPr lang="en-US" dirty="0"/>
-              <a:t>Data protection, foundational controls. These are configured when the environment is built and are expected at E at every review. Secure transfer required on storage accounts: Storage accounts configured to require secure transfer. Storage minimum TLS 1.2: Storage accounts requiring TLS 1.2 or newer. Key Vault soft delete: Vaults able to recover deleted secrets, keys and certificates. Key Vault purge protection: Vaults protected against permanent deletion during the retention period. Managed disks encrypted at rest: Platform keys, the Azure default, or customer managed keys. Encryption at host is graded separately. Safe Links policy set for mail, Teams and Office: One policy with all three on is enough. Recipients, exceptions and rule state are not read. Safe Attachments policy set to block or replace malicious files: One enabled policy is enough. Scope and exceptions are not read. Malicious mail removed after delivery: Post-delivery removals of malicious mail in the last 30 days. Zero-hour auto purge enabled for malware, spam and phishing: Every malware and content filter policy keeps zero-hour auto purge on.</a:t>
+              <a:t>Data protection, foundational controls. These are configured when the environment is built and are expected at E at every review. Secure transfer required on storage accounts: Storage accounts configured to require secure transfer. Storage minimum TLS 1.2: Storage accounts requiring TLS 1.2 or newer. Key Vault soft delete: Vaults able to recover deleted secrets, keys and certificates. Key Vault purge protection: Vaults protected against permanent deletion during the retention period. Managed disks encrypted at rest: Platform keys, the Azure default, or customer managed keys. Encryption at host is graded separately. Safe Links policy set for mail, Teams and Office: Reads In force when one policy has all three on. Recipients, exceptions and rule state are not read. Safe Attachments policy set to block or replace malicious files: Read from any one enabled policy. Scope and exceptions are not read. Malicious mail removed after delivery: Post-delivery removals of malicious mail in the last 30 days. Zero-hour auto purge enabled for malware, spam and phishing: Every malware and content filter policy keeps zero-hour auto purge on.</a:t>
             </a:r>
             <a:endParaRPr lang="en-US" dirty="0"/>
           </a:p>
@@ -4946,7 +4946,7 @@
                   <a:schemeClr val="accent6"/>
                 </a:solidFill>
               </a:rPr>
-              <a:t>One policy with all three on is enough. Recipients, exceptions and rule state are not read.</a:t>
+              <a:t>Reads In force when one policy has all three on. Recipients, exceptions and rule state are not read.</a:t>
             </a:r>
             <a:endParaRPr lang="en-US" sz="1400" dirty="0"/>
           </a:p>
@@ -5066,7 +5066,7 @@
                   <a:schemeClr val="accent6"/>
                 </a:solidFill>
               </a:rPr>
-              <a:t>One enabled policy is enough. Scope and exceptions are not read.</a:t>
+              <a:t>Read from any one enabled policy. Scope and exceptions are not read.</a:t>
             </a:r>
             <a:endParaRPr lang="en-US" sz="1400" dirty="0"/>
           </a:p>
